--- a/데이터시각화/데이터분석-4기-2025-08-07/2025-08-18/너를위한-통계적추론(통계적분석).pptx
+++ b/데이터시각화/데이터분석-4기-2025-08-07/2025-08-18/너를위한-통계적추론(통계적분석).pptx
@@ -513,6 +513,2210 @@
   <p:cSld>
     <p:spTree>
       <p:nvGrpSpPr>
+        <p:cNvPr id="1" name=""/>
+        <p:cNvGrpSpPr/>
+        <p:nvPr/>
+      </p:nvGrpSpPr>
+      <p:grpSpPr>
+        <a:xfrm>
+          <a:off x="0" y="0"/>
+          <a:ext cx="0" cy="0"/>
+          <a:chOff x="0" y="0"/>
+          <a:chExt cx="0" cy="0"/>
+        </a:xfrm>
+      </p:grpSpPr>
+      <p:sp>
+        <p:nvSpPr>
+          <p:cNvPr id="2" name="슬라이드 이미지 개체 틀 1"/>
+          <p:cNvSpPr>
+            <a:spLocks noGrp="1" noRot="1" noChangeAspect="1"/>
+          </p:cNvSpPr>
+          <p:nvPr>
+            <p:ph type="sldImg"/>
+          </p:nvPr>
+        </p:nvSpPr>
+        <p:spPr/>
+      </p:sp>
+      <p:sp>
+        <p:nvSpPr>
+          <p:cNvPr id="3" name="슬라이드 노트 개체 틀 2"/>
+          <p:cNvSpPr>
+            <a:spLocks noGrp="1"/>
+          </p:cNvSpPr>
+          <p:nvPr>
+            <p:ph type="body" idx="1"/>
+          </p:nvPr>
+        </p:nvSpPr>
+        <p:spPr/>
+        <p:txBody>
+          <a:bodyPr/>
+          <a:lstStyle/>
+          <a:p>
+            <a:pPr marL="0" marR="0" lvl="0" indent="0" algn="l" defTabSz="914400" rtl="0" eaLnBrk="1" fontAlgn="auto" latinLnBrk="1" hangingPunct="1">
+              <a:lnSpc>
+                <a:spcPct val="100000"/>
+              </a:lnSpc>
+              <a:spcBef>
+                <a:spcPts val="0"/>
+              </a:spcBef>
+              <a:spcAft>
+                <a:spcPts val="0"/>
+              </a:spcAft>
+              <a:buClrTx/>
+              <a:buSzTx/>
+              <a:buFontTx/>
+              <a:buNone/>
+              <a:tabLst/>
+              <a:defRPr/>
+            </a:pPr>
+            <a:r>
+              <a:rPr lang="en-US" altLang="ko-KR" dirty="0"/>
+              <a:t>https://www.youtube.com/watch?v=jFv0R5OyT5k</a:t>
+            </a:r>
+            <a:endParaRPr lang="ko-KR" altLang="en-US" dirty="0"/>
+          </a:p>
+          <a:p>
+            <a:endParaRPr lang="ko-KR" altLang="en-US" dirty="0"/>
+          </a:p>
+        </p:txBody>
+      </p:sp>
+      <p:sp>
+        <p:nvSpPr>
+          <p:cNvPr id="4" name="슬라이드 번호 개체 틀 3"/>
+          <p:cNvSpPr>
+            <a:spLocks noGrp="1"/>
+          </p:cNvSpPr>
+          <p:nvPr>
+            <p:ph type="sldNum" sz="quarter" idx="5"/>
+          </p:nvPr>
+        </p:nvSpPr>
+        <p:spPr/>
+        <p:txBody>
+          <a:bodyPr/>
+          <a:lstStyle/>
+          <a:p>
+            <a:fld id="{353DFDED-2E9F-41DA-A9FA-780DFF41939C}" type="slidenum">
+              <a:rPr lang="ko-KR" altLang="en-US" smtClean="0"/>
+              <a:t>1</a:t>
+            </a:fld>
+            <a:endParaRPr lang="ko-KR" altLang="en-US"/>
+          </a:p>
+        </p:txBody>
+      </p:sp>
+    </p:spTree>
+    <p:extLst>
+      <p:ext uri="{BB962C8B-B14F-4D97-AF65-F5344CB8AC3E}">
+        <p14:creationId xmlns:p14="http://schemas.microsoft.com/office/powerpoint/2010/main" val="2493128148"/>
+      </p:ext>
+    </p:extLst>
+  </p:cSld>
+  <p:clrMapOvr>
+    <a:masterClrMapping/>
+  </p:clrMapOvr>
+</p:notes>
+</file>
+
+<file path=ppt/notesSlides/notesSlide10.xml><?xml version="1.0" encoding="utf-8"?>
+<p:notes xmlns:a="http://schemas.openxmlformats.org/drawingml/2006/main" xmlns:r="http://schemas.openxmlformats.org/officeDocument/2006/relationships" xmlns:p="http://schemas.openxmlformats.org/presentationml/2006/main">
+  <p:cSld>
+    <p:spTree>
+      <p:nvGrpSpPr>
+        <p:cNvPr id="1" name=""/>
+        <p:cNvGrpSpPr/>
+        <p:nvPr/>
+      </p:nvGrpSpPr>
+      <p:grpSpPr>
+        <a:xfrm>
+          <a:off x="0" y="0"/>
+          <a:ext cx="0" cy="0"/>
+          <a:chOff x="0" y="0"/>
+          <a:chExt cx="0" cy="0"/>
+        </a:xfrm>
+      </p:grpSpPr>
+      <p:sp>
+        <p:nvSpPr>
+          <p:cNvPr id="2" name="슬라이드 이미지 개체 틀 1"/>
+          <p:cNvSpPr>
+            <a:spLocks noGrp="1" noRot="1" noChangeAspect="1"/>
+          </p:cNvSpPr>
+          <p:nvPr>
+            <p:ph type="sldImg"/>
+          </p:nvPr>
+        </p:nvSpPr>
+        <p:spPr/>
+      </p:sp>
+      <p:sp>
+        <p:nvSpPr>
+          <p:cNvPr id="3" name="슬라이드 노트 개체 틀 2"/>
+          <p:cNvSpPr>
+            <a:spLocks noGrp="1"/>
+          </p:cNvSpPr>
+          <p:nvPr>
+            <p:ph type="body" idx="1"/>
+          </p:nvPr>
+        </p:nvSpPr>
+        <p:spPr/>
+        <p:txBody>
+          <a:bodyPr/>
+          <a:lstStyle/>
+          <a:p>
+            <a:endParaRPr lang="ko-KR" altLang="en-US" dirty="0"/>
+          </a:p>
+        </p:txBody>
+      </p:sp>
+      <p:sp>
+        <p:nvSpPr>
+          <p:cNvPr id="4" name="슬라이드 번호 개체 틀 3"/>
+          <p:cNvSpPr>
+            <a:spLocks noGrp="1"/>
+          </p:cNvSpPr>
+          <p:nvPr>
+            <p:ph type="sldNum" sz="quarter" idx="5"/>
+          </p:nvPr>
+        </p:nvSpPr>
+        <p:spPr/>
+        <p:txBody>
+          <a:bodyPr/>
+          <a:lstStyle/>
+          <a:p>
+            <a:fld id="{353DFDED-2E9F-41DA-A9FA-780DFF41939C}" type="slidenum">
+              <a:rPr lang="ko-KR" altLang="en-US" smtClean="0"/>
+              <a:t>11</a:t>
+            </a:fld>
+            <a:endParaRPr lang="ko-KR" altLang="en-US"/>
+          </a:p>
+        </p:txBody>
+      </p:sp>
+    </p:spTree>
+    <p:extLst>
+      <p:ext uri="{BB962C8B-B14F-4D97-AF65-F5344CB8AC3E}">
+        <p14:creationId xmlns:p14="http://schemas.microsoft.com/office/powerpoint/2010/main" val="1788561133"/>
+      </p:ext>
+    </p:extLst>
+  </p:cSld>
+  <p:clrMapOvr>
+    <a:masterClrMapping/>
+  </p:clrMapOvr>
+</p:notes>
+</file>
+
+<file path=ppt/notesSlides/notesSlide11.xml><?xml version="1.0" encoding="utf-8"?>
+<p:notes xmlns:a="http://schemas.openxmlformats.org/drawingml/2006/main" xmlns:r="http://schemas.openxmlformats.org/officeDocument/2006/relationships" xmlns:p="http://schemas.openxmlformats.org/presentationml/2006/main">
+  <p:cSld>
+    <p:spTree>
+      <p:nvGrpSpPr>
+        <p:cNvPr id="1" name="">
+          <a:extLst>
+            <a:ext uri="{FF2B5EF4-FFF2-40B4-BE49-F238E27FC236}">
+              <a16:creationId xmlns:a16="http://schemas.microsoft.com/office/drawing/2014/main" id="{6438BA2C-2480-B761-7F4D-177F139769A8}"/>
+            </a:ext>
+          </a:extLst>
+        </p:cNvPr>
+        <p:cNvGrpSpPr/>
+        <p:nvPr/>
+      </p:nvGrpSpPr>
+      <p:grpSpPr>
+        <a:xfrm>
+          <a:off x="0" y="0"/>
+          <a:ext cx="0" cy="0"/>
+          <a:chOff x="0" y="0"/>
+          <a:chExt cx="0" cy="0"/>
+        </a:xfrm>
+      </p:grpSpPr>
+      <p:sp>
+        <p:nvSpPr>
+          <p:cNvPr id="2" name="슬라이드 이미지 개체 틀 1">
+            <a:extLst>
+              <a:ext uri="{FF2B5EF4-FFF2-40B4-BE49-F238E27FC236}">
+                <a16:creationId xmlns:a16="http://schemas.microsoft.com/office/drawing/2014/main" id="{E5FDB332-4CCA-C229-839E-9654695517E1}"/>
+              </a:ext>
+            </a:extLst>
+          </p:cNvPr>
+          <p:cNvSpPr>
+            <a:spLocks noGrp="1" noRot="1" noChangeAspect="1"/>
+          </p:cNvSpPr>
+          <p:nvPr>
+            <p:ph type="sldImg"/>
+          </p:nvPr>
+        </p:nvSpPr>
+        <p:spPr/>
+      </p:sp>
+      <p:sp>
+        <p:nvSpPr>
+          <p:cNvPr id="3" name="슬라이드 노트 개체 틀 2">
+            <a:extLst>
+              <a:ext uri="{FF2B5EF4-FFF2-40B4-BE49-F238E27FC236}">
+                <a16:creationId xmlns:a16="http://schemas.microsoft.com/office/drawing/2014/main" id="{DB661E98-7067-30D5-C55A-383FEDAB0E29}"/>
+              </a:ext>
+            </a:extLst>
+          </p:cNvPr>
+          <p:cNvSpPr>
+            <a:spLocks noGrp="1"/>
+          </p:cNvSpPr>
+          <p:nvPr>
+            <p:ph type="body" idx="1"/>
+          </p:nvPr>
+        </p:nvSpPr>
+        <p:spPr/>
+        <p:txBody>
+          <a:bodyPr/>
+          <a:lstStyle/>
+          <a:p>
+            <a:r>
+              <a:rPr lang="en-US" altLang="ko-KR" dirty="0"/>
+              <a:t>https://velog.io/@kungsboy/%EB%8D%B0%EC%9D%B4%ED%84%B0%EB%B6%84%EC%84%9D-%ED%86%B5%EA%B3%84%EC%9D%98-%EB%B3%B8%EC%A7%88%EB%B6%84%EC%82%B0%EC%9D%B4-%EB%A7%88%EB%B2%95%EC%9D%B8-%EC%9D%B4%EC%9C%A0</a:t>
+            </a:r>
+            <a:endParaRPr lang="ko-KR" altLang="en-US" dirty="0"/>
+          </a:p>
+        </p:txBody>
+      </p:sp>
+      <p:sp>
+        <p:nvSpPr>
+          <p:cNvPr id="4" name="슬라이드 번호 개체 틀 3">
+            <a:extLst>
+              <a:ext uri="{FF2B5EF4-FFF2-40B4-BE49-F238E27FC236}">
+                <a16:creationId xmlns:a16="http://schemas.microsoft.com/office/drawing/2014/main" id="{AC8AA931-BC8C-9AA5-D394-EB4B165E6EE1}"/>
+              </a:ext>
+            </a:extLst>
+          </p:cNvPr>
+          <p:cNvSpPr>
+            <a:spLocks noGrp="1"/>
+          </p:cNvSpPr>
+          <p:nvPr>
+            <p:ph type="sldNum" sz="quarter" idx="5"/>
+          </p:nvPr>
+        </p:nvSpPr>
+        <p:spPr/>
+        <p:txBody>
+          <a:bodyPr/>
+          <a:lstStyle/>
+          <a:p>
+            <a:fld id="{353DFDED-2E9F-41DA-A9FA-780DFF41939C}" type="slidenum">
+              <a:rPr lang="ko-KR" altLang="en-US" smtClean="0"/>
+              <a:t>12</a:t>
+            </a:fld>
+            <a:endParaRPr lang="ko-KR" altLang="en-US"/>
+          </a:p>
+        </p:txBody>
+      </p:sp>
+    </p:spTree>
+    <p:extLst>
+      <p:ext uri="{BB962C8B-B14F-4D97-AF65-F5344CB8AC3E}">
+        <p14:creationId xmlns:p14="http://schemas.microsoft.com/office/powerpoint/2010/main" val="1410300145"/>
+      </p:ext>
+    </p:extLst>
+  </p:cSld>
+  <p:clrMapOvr>
+    <a:masterClrMapping/>
+  </p:clrMapOvr>
+</p:notes>
+</file>
+
+<file path=ppt/notesSlides/notesSlide12.xml><?xml version="1.0" encoding="utf-8"?>
+<p:notes xmlns:a="http://schemas.openxmlformats.org/drawingml/2006/main" xmlns:r="http://schemas.openxmlformats.org/officeDocument/2006/relationships" xmlns:p="http://schemas.openxmlformats.org/presentationml/2006/main">
+  <p:cSld>
+    <p:spTree>
+      <p:nvGrpSpPr>
+        <p:cNvPr id="1" name=""/>
+        <p:cNvGrpSpPr/>
+        <p:nvPr/>
+      </p:nvGrpSpPr>
+      <p:grpSpPr>
+        <a:xfrm>
+          <a:off x="0" y="0"/>
+          <a:ext cx="0" cy="0"/>
+          <a:chOff x="0" y="0"/>
+          <a:chExt cx="0" cy="0"/>
+        </a:xfrm>
+      </p:grpSpPr>
+      <p:sp>
+        <p:nvSpPr>
+          <p:cNvPr id="2" name="슬라이드 이미지 개체 틀 1"/>
+          <p:cNvSpPr>
+            <a:spLocks noGrp="1" noRot="1" noChangeAspect="1"/>
+          </p:cNvSpPr>
+          <p:nvPr>
+            <p:ph type="sldImg"/>
+          </p:nvPr>
+        </p:nvSpPr>
+        <p:spPr/>
+      </p:sp>
+      <p:sp>
+        <p:nvSpPr>
+          <p:cNvPr id="3" name="슬라이드 노트 개체 틀 2"/>
+          <p:cNvSpPr>
+            <a:spLocks noGrp="1"/>
+          </p:cNvSpPr>
+          <p:nvPr>
+            <p:ph type="body" idx="1"/>
+          </p:nvPr>
+        </p:nvSpPr>
+        <p:spPr/>
+        <p:txBody>
+          <a:bodyPr/>
+          <a:lstStyle/>
+          <a:p>
+            <a:r>
+              <a:rPr lang="en-US" altLang="ko-KR" dirty="0"/>
+              <a:t>https://learnx.tistory.com/entry/%ED%86%B5%EA%B3%84%EC%9D%98-%EA%B8%B0%EC%B4%88%EC%9D%B8-%ED%8F%89%EA%B7%A0-%EB%B6%84%EC%82%B0-%ED%91%9C%EC%A4%80%ED%8E%B8%EC%B0%A8</a:t>
+            </a:r>
+            <a:endParaRPr lang="ko-KR" altLang="en-US" dirty="0"/>
+          </a:p>
+        </p:txBody>
+      </p:sp>
+      <p:sp>
+        <p:nvSpPr>
+          <p:cNvPr id="4" name="슬라이드 번호 개체 틀 3"/>
+          <p:cNvSpPr>
+            <a:spLocks noGrp="1"/>
+          </p:cNvSpPr>
+          <p:nvPr>
+            <p:ph type="sldNum" sz="quarter" idx="5"/>
+          </p:nvPr>
+        </p:nvSpPr>
+        <p:spPr/>
+        <p:txBody>
+          <a:bodyPr/>
+          <a:lstStyle/>
+          <a:p>
+            <a:fld id="{353DFDED-2E9F-41DA-A9FA-780DFF41939C}" type="slidenum">
+              <a:rPr lang="ko-KR" altLang="en-US" smtClean="0"/>
+              <a:t>13</a:t>
+            </a:fld>
+            <a:endParaRPr lang="ko-KR" altLang="en-US"/>
+          </a:p>
+        </p:txBody>
+      </p:sp>
+    </p:spTree>
+    <p:extLst>
+      <p:ext uri="{BB962C8B-B14F-4D97-AF65-F5344CB8AC3E}">
+        <p14:creationId xmlns:p14="http://schemas.microsoft.com/office/powerpoint/2010/main" val="1305977835"/>
+      </p:ext>
+    </p:extLst>
+  </p:cSld>
+  <p:clrMapOvr>
+    <a:masterClrMapping/>
+  </p:clrMapOvr>
+</p:notes>
+</file>
+
+<file path=ppt/notesSlides/notesSlide13.xml><?xml version="1.0" encoding="utf-8"?>
+<p:notes xmlns:a="http://schemas.openxmlformats.org/drawingml/2006/main" xmlns:r="http://schemas.openxmlformats.org/officeDocument/2006/relationships" xmlns:p="http://schemas.openxmlformats.org/presentationml/2006/main">
+  <p:cSld>
+    <p:spTree>
+      <p:nvGrpSpPr>
+        <p:cNvPr id="1" name=""/>
+        <p:cNvGrpSpPr/>
+        <p:nvPr/>
+      </p:nvGrpSpPr>
+      <p:grpSpPr>
+        <a:xfrm>
+          <a:off x="0" y="0"/>
+          <a:ext cx="0" cy="0"/>
+          <a:chOff x="0" y="0"/>
+          <a:chExt cx="0" cy="0"/>
+        </a:xfrm>
+      </p:grpSpPr>
+      <p:sp>
+        <p:nvSpPr>
+          <p:cNvPr id="2" name="슬라이드 이미지 개체 틀 1"/>
+          <p:cNvSpPr>
+            <a:spLocks noGrp="1" noRot="1" noChangeAspect="1"/>
+          </p:cNvSpPr>
+          <p:nvPr>
+            <p:ph type="sldImg"/>
+          </p:nvPr>
+        </p:nvSpPr>
+        <p:spPr/>
+      </p:sp>
+      <p:sp>
+        <p:nvSpPr>
+          <p:cNvPr id="3" name="슬라이드 노트 개체 틀 2"/>
+          <p:cNvSpPr>
+            <a:spLocks noGrp="1"/>
+          </p:cNvSpPr>
+          <p:nvPr>
+            <p:ph type="body" idx="1"/>
+          </p:nvPr>
+        </p:nvSpPr>
+        <p:spPr/>
+        <p:txBody>
+          <a:bodyPr/>
+          <a:lstStyle/>
+          <a:p>
+            <a:r>
+              <a:rPr lang="en-US" altLang="ko-KR" dirty="0"/>
+              <a:t>https://learnx.tistory.com/entry/%ED%86%B5%EA%B3%84%EC%9D%98-%EA%B8%B0%EC%B4%88%EC%9D%B8-%ED%8F%89%EA%B7%A0-%EB%B6%84%EC%82%B0-%ED%91%9C%EC%A4%80%ED%8E%B8%EC%B0%A8</a:t>
+            </a:r>
+            <a:endParaRPr lang="ko-KR" altLang="en-US" dirty="0"/>
+          </a:p>
+        </p:txBody>
+      </p:sp>
+      <p:sp>
+        <p:nvSpPr>
+          <p:cNvPr id="4" name="슬라이드 번호 개체 틀 3"/>
+          <p:cNvSpPr>
+            <a:spLocks noGrp="1"/>
+          </p:cNvSpPr>
+          <p:nvPr>
+            <p:ph type="sldNum" sz="quarter" idx="5"/>
+          </p:nvPr>
+        </p:nvSpPr>
+        <p:spPr/>
+        <p:txBody>
+          <a:bodyPr/>
+          <a:lstStyle/>
+          <a:p>
+            <a:fld id="{353DFDED-2E9F-41DA-A9FA-780DFF41939C}" type="slidenum">
+              <a:rPr lang="ko-KR" altLang="en-US" smtClean="0"/>
+              <a:t>14</a:t>
+            </a:fld>
+            <a:endParaRPr lang="ko-KR" altLang="en-US"/>
+          </a:p>
+        </p:txBody>
+      </p:sp>
+    </p:spTree>
+    <p:extLst>
+      <p:ext uri="{BB962C8B-B14F-4D97-AF65-F5344CB8AC3E}">
+        <p14:creationId xmlns:p14="http://schemas.microsoft.com/office/powerpoint/2010/main" val="121878011"/>
+      </p:ext>
+    </p:extLst>
+  </p:cSld>
+  <p:clrMapOvr>
+    <a:masterClrMapping/>
+  </p:clrMapOvr>
+</p:notes>
+</file>
+
+<file path=ppt/notesSlides/notesSlide14.xml><?xml version="1.0" encoding="utf-8"?>
+<p:notes xmlns:a="http://schemas.openxmlformats.org/drawingml/2006/main" xmlns:r="http://schemas.openxmlformats.org/officeDocument/2006/relationships" xmlns:p="http://schemas.openxmlformats.org/presentationml/2006/main">
+  <p:cSld>
+    <p:spTree>
+      <p:nvGrpSpPr>
+        <p:cNvPr id="1" name=""/>
+        <p:cNvGrpSpPr/>
+        <p:nvPr/>
+      </p:nvGrpSpPr>
+      <p:grpSpPr>
+        <a:xfrm>
+          <a:off x="0" y="0"/>
+          <a:ext cx="0" cy="0"/>
+          <a:chOff x="0" y="0"/>
+          <a:chExt cx="0" cy="0"/>
+        </a:xfrm>
+      </p:grpSpPr>
+      <p:sp>
+        <p:nvSpPr>
+          <p:cNvPr id="2" name="슬라이드 이미지 개체 틀 1"/>
+          <p:cNvSpPr>
+            <a:spLocks noGrp="1" noRot="1" noChangeAspect="1"/>
+          </p:cNvSpPr>
+          <p:nvPr>
+            <p:ph type="sldImg"/>
+          </p:nvPr>
+        </p:nvSpPr>
+        <p:spPr/>
+      </p:sp>
+      <p:sp>
+        <p:nvSpPr>
+          <p:cNvPr id="3" name="슬라이드 노트 개체 틀 2"/>
+          <p:cNvSpPr>
+            <a:spLocks noGrp="1"/>
+          </p:cNvSpPr>
+          <p:nvPr>
+            <p:ph type="body" idx="1"/>
+          </p:nvPr>
+        </p:nvSpPr>
+        <p:spPr/>
+        <p:txBody>
+          <a:bodyPr/>
+          <a:lstStyle/>
+          <a:p>
+            <a:r>
+              <a:rPr lang="en-US" altLang="ko-KR" dirty="0"/>
+              <a:t>https://ko.khanacademy.org/math/statistics-probability/modeling-distributions-of-data/normal-distributions-library/a/normal-distributions-review</a:t>
+            </a:r>
+            <a:endParaRPr lang="ko-KR" altLang="en-US" dirty="0"/>
+          </a:p>
+        </p:txBody>
+      </p:sp>
+      <p:sp>
+        <p:nvSpPr>
+          <p:cNvPr id="4" name="슬라이드 번호 개체 틀 3"/>
+          <p:cNvSpPr>
+            <a:spLocks noGrp="1"/>
+          </p:cNvSpPr>
+          <p:nvPr>
+            <p:ph type="sldNum" sz="quarter" idx="5"/>
+          </p:nvPr>
+        </p:nvSpPr>
+        <p:spPr/>
+        <p:txBody>
+          <a:bodyPr/>
+          <a:lstStyle/>
+          <a:p>
+            <a:fld id="{353DFDED-2E9F-41DA-A9FA-780DFF41939C}" type="slidenum">
+              <a:rPr lang="ko-KR" altLang="en-US" smtClean="0"/>
+              <a:t>17</a:t>
+            </a:fld>
+            <a:endParaRPr lang="ko-KR" altLang="en-US"/>
+          </a:p>
+        </p:txBody>
+      </p:sp>
+    </p:spTree>
+    <p:extLst>
+      <p:ext uri="{BB962C8B-B14F-4D97-AF65-F5344CB8AC3E}">
+        <p14:creationId xmlns:p14="http://schemas.microsoft.com/office/powerpoint/2010/main" val="457903083"/>
+      </p:ext>
+    </p:extLst>
+  </p:cSld>
+  <p:clrMapOvr>
+    <a:masterClrMapping/>
+  </p:clrMapOvr>
+</p:notes>
+</file>
+
+<file path=ppt/notesSlides/notesSlide15.xml><?xml version="1.0" encoding="utf-8"?>
+<p:notes xmlns:a="http://schemas.openxmlformats.org/drawingml/2006/main" xmlns:r="http://schemas.openxmlformats.org/officeDocument/2006/relationships" xmlns:p="http://schemas.openxmlformats.org/presentationml/2006/main">
+  <p:cSld>
+    <p:spTree>
+      <p:nvGrpSpPr>
+        <p:cNvPr id="1" name=""/>
+        <p:cNvGrpSpPr/>
+        <p:nvPr/>
+      </p:nvGrpSpPr>
+      <p:grpSpPr>
+        <a:xfrm>
+          <a:off x="0" y="0"/>
+          <a:ext cx="0" cy="0"/>
+          <a:chOff x="0" y="0"/>
+          <a:chExt cx="0" cy="0"/>
+        </a:xfrm>
+      </p:grpSpPr>
+      <p:sp>
+        <p:nvSpPr>
+          <p:cNvPr id="2" name="슬라이드 이미지 개체 틀 1"/>
+          <p:cNvSpPr>
+            <a:spLocks noGrp="1" noRot="1" noChangeAspect="1"/>
+          </p:cNvSpPr>
+          <p:nvPr>
+            <p:ph type="sldImg"/>
+          </p:nvPr>
+        </p:nvSpPr>
+        <p:spPr/>
+      </p:sp>
+      <p:sp>
+        <p:nvSpPr>
+          <p:cNvPr id="3" name="슬라이드 노트 개체 틀 2"/>
+          <p:cNvSpPr>
+            <a:spLocks noGrp="1"/>
+          </p:cNvSpPr>
+          <p:nvPr>
+            <p:ph type="body" idx="1"/>
+          </p:nvPr>
+        </p:nvSpPr>
+        <p:spPr/>
+        <p:txBody>
+          <a:bodyPr/>
+          <a:lstStyle/>
+          <a:p>
+            <a:r>
+              <a:rPr lang="en-US" altLang="ko-KR" dirty="0"/>
+              <a:t>https://www.youtube.com/watch?v=S1I4363aQz8&amp;t=134s</a:t>
+            </a:r>
+            <a:endParaRPr lang="ko-KR" altLang="en-US" dirty="0"/>
+          </a:p>
+        </p:txBody>
+      </p:sp>
+      <p:sp>
+        <p:nvSpPr>
+          <p:cNvPr id="4" name="슬라이드 번호 개체 틀 3"/>
+          <p:cNvSpPr>
+            <a:spLocks noGrp="1"/>
+          </p:cNvSpPr>
+          <p:nvPr>
+            <p:ph type="sldNum" sz="quarter" idx="5"/>
+          </p:nvPr>
+        </p:nvSpPr>
+        <p:spPr/>
+        <p:txBody>
+          <a:bodyPr/>
+          <a:lstStyle/>
+          <a:p>
+            <a:fld id="{353DFDED-2E9F-41DA-A9FA-780DFF41939C}" type="slidenum">
+              <a:rPr lang="ko-KR" altLang="en-US" smtClean="0"/>
+              <a:t>18</a:t>
+            </a:fld>
+            <a:endParaRPr lang="ko-KR" altLang="en-US"/>
+          </a:p>
+        </p:txBody>
+      </p:sp>
+    </p:spTree>
+    <p:extLst>
+      <p:ext uri="{BB962C8B-B14F-4D97-AF65-F5344CB8AC3E}">
+        <p14:creationId xmlns:p14="http://schemas.microsoft.com/office/powerpoint/2010/main" val="321384134"/>
+      </p:ext>
+    </p:extLst>
+  </p:cSld>
+  <p:clrMapOvr>
+    <a:masterClrMapping/>
+  </p:clrMapOvr>
+</p:notes>
+</file>
+
+<file path=ppt/notesSlides/notesSlide16.xml><?xml version="1.0" encoding="utf-8"?>
+<p:notes xmlns:a="http://schemas.openxmlformats.org/drawingml/2006/main" xmlns:r="http://schemas.openxmlformats.org/officeDocument/2006/relationships" xmlns:p="http://schemas.openxmlformats.org/presentationml/2006/main">
+  <p:cSld>
+    <p:spTree>
+      <p:nvGrpSpPr>
+        <p:cNvPr id="1" name=""/>
+        <p:cNvGrpSpPr/>
+        <p:nvPr/>
+      </p:nvGrpSpPr>
+      <p:grpSpPr>
+        <a:xfrm>
+          <a:off x="0" y="0"/>
+          <a:ext cx="0" cy="0"/>
+          <a:chOff x="0" y="0"/>
+          <a:chExt cx="0" cy="0"/>
+        </a:xfrm>
+      </p:grpSpPr>
+      <p:sp>
+        <p:nvSpPr>
+          <p:cNvPr id="2" name="슬라이드 이미지 개체 틀 1"/>
+          <p:cNvSpPr>
+            <a:spLocks noGrp="1" noRot="1" noChangeAspect="1"/>
+          </p:cNvSpPr>
+          <p:nvPr>
+            <p:ph type="sldImg"/>
+          </p:nvPr>
+        </p:nvSpPr>
+        <p:spPr/>
+      </p:sp>
+      <p:sp>
+        <p:nvSpPr>
+          <p:cNvPr id="3" name="슬라이드 노트 개체 틀 2"/>
+          <p:cNvSpPr>
+            <a:spLocks noGrp="1"/>
+          </p:cNvSpPr>
+          <p:nvPr>
+            <p:ph type="body" idx="1"/>
+          </p:nvPr>
+        </p:nvSpPr>
+        <p:spPr/>
+        <p:txBody>
+          <a:bodyPr/>
+          <a:lstStyle/>
+          <a:p>
+            <a:r>
+              <a:rPr lang="en-US" altLang="ko-KR" dirty="0"/>
+              <a:t>https://www.youtube.com/watch?v=jFv0R5OyT5k</a:t>
+            </a:r>
+            <a:endParaRPr lang="ko-KR" altLang="en-US" dirty="0"/>
+          </a:p>
+        </p:txBody>
+      </p:sp>
+      <p:sp>
+        <p:nvSpPr>
+          <p:cNvPr id="4" name="슬라이드 번호 개체 틀 3"/>
+          <p:cNvSpPr>
+            <a:spLocks noGrp="1"/>
+          </p:cNvSpPr>
+          <p:nvPr>
+            <p:ph type="sldNum" sz="quarter" idx="5"/>
+          </p:nvPr>
+        </p:nvSpPr>
+        <p:spPr/>
+        <p:txBody>
+          <a:bodyPr/>
+          <a:lstStyle/>
+          <a:p>
+            <a:fld id="{353DFDED-2E9F-41DA-A9FA-780DFF41939C}" type="slidenum">
+              <a:rPr lang="ko-KR" altLang="en-US" smtClean="0"/>
+              <a:t>19</a:t>
+            </a:fld>
+            <a:endParaRPr lang="ko-KR" altLang="en-US"/>
+          </a:p>
+        </p:txBody>
+      </p:sp>
+    </p:spTree>
+    <p:extLst>
+      <p:ext uri="{BB962C8B-B14F-4D97-AF65-F5344CB8AC3E}">
+        <p14:creationId xmlns:p14="http://schemas.microsoft.com/office/powerpoint/2010/main" val="1162303717"/>
+      </p:ext>
+    </p:extLst>
+  </p:cSld>
+  <p:clrMapOvr>
+    <a:masterClrMapping/>
+  </p:clrMapOvr>
+</p:notes>
+</file>
+
+<file path=ppt/notesSlides/notesSlide17.xml><?xml version="1.0" encoding="utf-8"?>
+<p:notes xmlns:a="http://schemas.openxmlformats.org/drawingml/2006/main" xmlns:r="http://schemas.openxmlformats.org/officeDocument/2006/relationships" xmlns:p="http://schemas.openxmlformats.org/presentationml/2006/main">
+  <p:cSld>
+    <p:spTree>
+      <p:nvGrpSpPr>
+        <p:cNvPr id="1" name=""/>
+        <p:cNvGrpSpPr/>
+        <p:nvPr/>
+      </p:nvGrpSpPr>
+      <p:grpSpPr>
+        <a:xfrm>
+          <a:off x="0" y="0"/>
+          <a:ext cx="0" cy="0"/>
+          <a:chOff x="0" y="0"/>
+          <a:chExt cx="0" cy="0"/>
+        </a:xfrm>
+      </p:grpSpPr>
+      <p:sp>
+        <p:nvSpPr>
+          <p:cNvPr id="2" name="슬라이드 이미지 개체 틀 1"/>
+          <p:cNvSpPr>
+            <a:spLocks noGrp="1" noRot="1" noChangeAspect="1"/>
+          </p:cNvSpPr>
+          <p:nvPr>
+            <p:ph type="sldImg"/>
+          </p:nvPr>
+        </p:nvSpPr>
+        <p:spPr/>
+      </p:sp>
+      <p:sp>
+        <p:nvSpPr>
+          <p:cNvPr id="3" name="슬라이드 노트 개체 틀 2"/>
+          <p:cNvSpPr>
+            <a:spLocks noGrp="1"/>
+          </p:cNvSpPr>
+          <p:nvPr>
+            <p:ph type="body" idx="1"/>
+          </p:nvPr>
+        </p:nvSpPr>
+        <p:spPr/>
+        <p:txBody>
+          <a:bodyPr/>
+          <a:lstStyle/>
+          <a:p>
+            <a:r>
+              <a:rPr lang="en-US" altLang="ko-KR" dirty="0"/>
+              <a:t>https://www.youtube.com/watch?v=S1I4363aQz8&amp;t=134s</a:t>
+            </a:r>
+            <a:endParaRPr lang="ko-KR" altLang="en-US" dirty="0"/>
+          </a:p>
+        </p:txBody>
+      </p:sp>
+      <p:sp>
+        <p:nvSpPr>
+          <p:cNvPr id="4" name="슬라이드 번호 개체 틀 3"/>
+          <p:cNvSpPr>
+            <a:spLocks noGrp="1"/>
+          </p:cNvSpPr>
+          <p:nvPr>
+            <p:ph type="sldNum" sz="quarter" idx="5"/>
+          </p:nvPr>
+        </p:nvSpPr>
+        <p:spPr/>
+        <p:txBody>
+          <a:bodyPr/>
+          <a:lstStyle/>
+          <a:p>
+            <a:fld id="{353DFDED-2E9F-41DA-A9FA-780DFF41939C}" type="slidenum">
+              <a:rPr lang="ko-KR" altLang="en-US" smtClean="0"/>
+              <a:t>20</a:t>
+            </a:fld>
+            <a:endParaRPr lang="ko-KR" altLang="en-US"/>
+          </a:p>
+        </p:txBody>
+      </p:sp>
+    </p:spTree>
+    <p:extLst>
+      <p:ext uri="{BB962C8B-B14F-4D97-AF65-F5344CB8AC3E}">
+        <p14:creationId xmlns:p14="http://schemas.microsoft.com/office/powerpoint/2010/main" val="1898582164"/>
+      </p:ext>
+    </p:extLst>
+  </p:cSld>
+  <p:clrMapOvr>
+    <a:masterClrMapping/>
+  </p:clrMapOvr>
+</p:notes>
+</file>
+
+<file path=ppt/notesSlides/notesSlide18.xml><?xml version="1.0" encoding="utf-8"?>
+<p:notes xmlns:a="http://schemas.openxmlformats.org/drawingml/2006/main" xmlns:r="http://schemas.openxmlformats.org/officeDocument/2006/relationships" xmlns:p="http://schemas.openxmlformats.org/presentationml/2006/main">
+  <p:cSld>
+    <p:spTree>
+      <p:nvGrpSpPr>
+        <p:cNvPr id="1" name=""/>
+        <p:cNvGrpSpPr/>
+        <p:nvPr/>
+      </p:nvGrpSpPr>
+      <p:grpSpPr>
+        <a:xfrm>
+          <a:off x="0" y="0"/>
+          <a:ext cx="0" cy="0"/>
+          <a:chOff x="0" y="0"/>
+          <a:chExt cx="0" cy="0"/>
+        </a:xfrm>
+      </p:grpSpPr>
+      <p:sp>
+        <p:nvSpPr>
+          <p:cNvPr id="2" name="슬라이드 이미지 개체 틀 1"/>
+          <p:cNvSpPr>
+            <a:spLocks noGrp="1" noRot="1" noChangeAspect="1"/>
+          </p:cNvSpPr>
+          <p:nvPr>
+            <p:ph type="sldImg"/>
+          </p:nvPr>
+        </p:nvSpPr>
+        <p:spPr/>
+      </p:sp>
+      <p:sp>
+        <p:nvSpPr>
+          <p:cNvPr id="3" name="슬라이드 노트 개체 틀 2"/>
+          <p:cNvSpPr>
+            <a:spLocks noGrp="1"/>
+          </p:cNvSpPr>
+          <p:nvPr>
+            <p:ph type="body" idx="1"/>
+          </p:nvPr>
+        </p:nvSpPr>
+        <p:spPr/>
+        <p:txBody>
+          <a:bodyPr/>
+          <a:lstStyle/>
+          <a:p>
+            <a:r>
+              <a:rPr lang="en-US" altLang="ko-KR" dirty="0"/>
+              <a:t>https://www.youtube.com/watch?v=S1I4363aQz8&amp;t=134s</a:t>
+            </a:r>
+            <a:endParaRPr lang="ko-KR" altLang="en-US" dirty="0"/>
+          </a:p>
+        </p:txBody>
+      </p:sp>
+      <p:sp>
+        <p:nvSpPr>
+          <p:cNvPr id="4" name="슬라이드 번호 개체 틀 3"/>
+          <p:cNvSpPr>
+            <a:spLocks noGrp="1"/>
+          </p:cNvSpPr>
+          <p:nvPr>
+            <p:ph type="sldNum" sz="quarter" idx="5"/>
+          </p:nvPr>
+        </p:nvSpPr>
+        <p:spPr/>
+        <p:txBody>
+          <a:bodyPr/>
+          <a:lstStyle/>
+          <a:p>
+            <a:fld id="{353DFDED-2E9F-41DA-A9FA-780DFF41939C}" type="slidenum">
+              <a:rPr lang="ko-KR" altLang="en-US" smtClean="0"/>
+              <a:t>21</a:t>
+            </a:fld>
+            <a:endParaRPr lang="ko-KR" altLang="en-US"/>
+          </a:p>
+        </p:txBody>
+      </p:sp>
+    </p:spTree>
+    <p:extLst>
+      <p:ext uri="{BB962C8B-B14F-4D97-AF65-F5344CB8AC3E}">
+        <p14:creationId xmlns:p14="http://schemas.microsoft.com/office/powerpoint/2010/main" val="973360043"/>
+      </p:ext>
+    </p:extLst>
+  </p:cSld>
+  <p:clrMapOvr>
+    <a:masterClrMapping/>
+  </p:clrMapOvr>
+</p:notes>
+</file>
+
+<file path=ppt/notesSlides/notesSlide19.xml><?xml version="1.0" encoding="utf-8"?>
+<p:notes xmlns:a="http://schemas.openxmlformats.org/drawingml/2006/main" xmlns:r="http://schemas.openxmlformats.org/officeDocument/2006/relationships" xmlns:p="http://schemas.openxmlformats.org/presentationml/2006/main">
+  <p:cSld>
+    <p:spTree>
+      <p:nvGrpSpPr>
+        <p:cNvPr id="1" name=""/>
+        <p:cNvGrpSpPr/>
+        <p:nvPr/>
+      </p:nvGrpSpPr>
+      <p:grpSpPr>
+        <a:xfrm>
+          <a:off x="0" y="0"/>
+          <a:ext cx="0" cy="0"/>
+          <a:chOff x="0" y="0"/>
+          <a:chExt cx="0" cy="0"/>
+        </a:xfrm>
+      </p:grpSpPr>
+      <p:sp>
+        <p:nvSpPr>
+          <p:cNvPr id="2" name="슬라이드 이미지 개체 틀 1"/>
+          <p:cNvSpPr>
+            <a:spLocks noGrp="1" noRot="1" noChangeAspect="1"/>
+          </p:cNvSpPr>
+          <p:nvPr>
+            <p:ph type="sldImg"/>
+          </p:nvPr>
+        </p:nvSpPr>
+        <p:spPr/>
+      </p:sp>
+      <p:sp>
+        <p:nvSpPr>
+          <p:cNvPr id="3" name="슬라이드 노트 개체 틀 2"/>
+          <p:cNvSpPr>
+            <a:spLocks noGrp="1"/>
+          </p:cNvSpPr>
+          <p:nvPr>
+            <p:ph type="body" idx="1"/>
+          </p:nvPr>
+        </p:nvSpPr>
+        <p:spPr/>
+        <p:txBody>
+          <a:bodyPr/>
+          <a:lstStyle/>
+          <a:p>
+            <a:r>
+              <a:rPr lang="en-US" altLang="ko-KR" dirty="0"/>
+              <a:t>https://www.youtube.com/watch?v=S1I4363aQz8&amp;t=134s</a:t>
+            </a:r>
+            <a:endParaRPr lang="ko-KR" altLang="en-US" dirty="0"/>
+          </a:p>
+        </p:txBody>
+      </p:sp>
+      <p:sp>
+        <p:nvSpPr>
+          <p:cNvPr id="4" name="슬라이드 번호 개체 틀 3"/>
+          <p:cNvSpPr>
+            <a:spLocks noGrp="1"/>
+          </p:cNvSpPr>
+          <p:nvPr>
+            <p:ph type="sldNum" sz="quarter" idx="5"/>
+          </p:nvPr>
+        </p:nvSpPr>
+        <p:spPr/>
+        <p:txBody>
+          <a:bodyPr/>
+          <a:lstStyle/>
+          <a:p>
+            <a:fld id="{353DFDED-2E9F-41DA-A9FA-780DFF41939C}" type="slidenum">
+              <a:rPr lang="ko-KR" altLang="en-US" smtClean="0"/>
+              <a:t>22</a:t>
+            </a:fld>
+            <a:endParaRPr lang="ko-KR" altLang="en-US"/>
+          </a:p>
+        </p:txBody>
+      </p:sp>
+    </p:spTree>
+    <p:extLst>
+      <p:ext uri="{BB962C8B-B14F-4D97-AF65-F5344CB8AC3E}">
+        <p14:creationId xmlns:p14="http://schemas.microsoft.com/office/powerpoint/2010/main" val="215973123"/>
+      </p:ext>
+    </p:extLst>
+  </p:cSld>
+  <p:clrMapOvr>
+    <a:masterClrMapping/>
+  </p:clrMapOvr>
+</p:notes>
+</file>
+
+<file path=ppt/notesSlides/notesSlide2.xml><?xml version="1.0" encoding="utf-8"?>
+<p:notes xmlns:a="http://schemas.openxmlformats.org/drawingml/2006/main" xmlns:r="http://schemas.openxmlformats.org/officeDocument/2006/relationships" xmlns:p="http://schemas.openxmlformats.org/presentationml/2006/main">
+  <p:cSld>
+    <p:spTree>
+      <p:nvGrpSpPr>
+        <p:cNvPr id="1" name=""/>
+        <p:cNvGrpSpPr/>
+        <p:nvPr/>
+      </p:nvGrpSpPr>
+      <p:grpSpPr>
+        <a:xfrm>
+          <a:off x="0" y="0"/>
+          <a:ext cx="0" cy="0"/>
+          <a:chOff x="0" y="0"/>
+          <a:chExt cx="0" cy="0"/>
+        </a:xfrm>
+      </p:grpSpPr>
+      <p:sp>
+        <p:nvSpPr>
+          <p:cNvPr id="2" name="슬라이드 이미지 개체 틀 1"/>
+          <p:cNvSpPr>
+            <a:spLocks noGrp="1" noRot="1" noChangeAspect="1"/>
+          </p:cNvSpPr>
+          <p:nvPr>
+            <p:ph type="sldImg"/>
+          </p:nvPr>
+        </p:nvSpPr>
+        <p:spPr/>
+      </p:sp>
+      <p:sp>
+        <p:nvSpPr>
+          <p:cNvPr id="3" name="슬라이드 노트 개체 틀 2"/>
+          <p:cNvSpPr>
+            <a:spLocks noGrp="1"/>
+          </p:cNvSpPr>
+          <p:nvPr>
+            <p:ph type="body" idx="1"/>
+          </p:nvPr>
+        </p:nvSpPr>
+        <p:spPr/>
+        <p:txBody>
+          <a:bodyPr/>
+          <a:lstStyle/>
+          <a:p>
+            <a:pPr marL="0" marR="0" lvl="0" indent="0" algn="l" defTabSz="914400" rtl="0" eaLnBrk="1" fontAlgn="auto" latinLnBrk="1" hangingPunct="1">
+              <a:lnSpc>
+                <a:spcPct val="100000"/>
+              </a:lnSpc>
+              <a:spcBef>
+                <a:spcPts val="0"/>
+              </a:spcBef>
+              <a:spcAft>
+                <a:spcPts val="0"/>
+              </a:spcAft>
+              <a:buClrTx/>
+              <a:buSzTx/>
+              <a:buFontTx/>
+              <a:buNone/>
+              <a:tabLst/>
+              <a:defRPr/>
+            </a:pPr>
+            <a:r>
+              <a:rPr lang="en-US" altLang="ko-KR" dirty="0"/>
+              <a:t>https://www.youtube.com/watch?v=jFv0R5OyT5k</a:t>
+            </a:r>
+            <a:endParaRPr lang="ko-KR" altLang="en-US" dirty="0"/>
+          </a:p>
+          <a:p>
+            <a:endParaRPr lang="ko-KR" altLang="en-US" dirty="0"/>
+          </a:p>
+        </p:txBody>
+      </p:sp>
+      <p:sp>
+        <p:nvSpPr>
+          <p:cNvPr id="4" name="슬라이드 번호 개체 틀 3"/>
+          <p:cNvSpPr>
+            <a:spLocks noGrp="1"/>
+          </p:cNvSpPr>
+          <p:nvPr>
+            <p:ph type="sldNum" sz="quarter" idx="5"/>
+          </p:nvPr>
+        </p:nvSpPr>
+        <p:spPr/>
+        <p:txBody>
+          <a:bodyPr/>
+          <a:lstStyle/>
+          <a:p>
+            <a:fld id="{353DFDED-2E9F-41DA-A9FA-780DFF41939C}" type="slidenum">
+              <a:rPr lang="ko-KR" altLang="en-US" smtClean="0"/>
+              <a:t>2</a:t>
+            </a:fld>
+            <a:endParaRPr lang="ko-KR" altLang="en-US"/>
+          </a:p>
+        </p:txBody>
+      </p:sp>
+    </p:spTree>
+    <p:extLst>
+      <p:ext uri="{BB962C8B-B14F-4D97-AF65-F5344CB8AC3E}">
+        <p14:creationId xmlns:p14="http://schemas.microsoft.com/office/powerpoint/2010/main" val="4218335705"/>
+      </p:ext>
+    </p:extLst>
+  </p:cSld>
+  <p:clrMapOvr>
+    <a:masterClrMapping/>
+  </p:clrMapOvr>
+</p:notes>
+</file>
+
+<file path=ppt/notesSlides/notesSlide20.xml><?xml version="1.0" encoding="utf-8"?>
+<p:notes xmlns:a="http://schemas.openxmlformats.org/drawingml/2006/main" xmlns:r="http://schemas.openxmlformats.org/officeDocument/2006/relationships" xmlns:p="http://schemas.openxmlformats.org/presentationml/2006/main">
+  <p:cSld>
+    <p:spTree>
+      <p:nvGrpSpPr>
+        <p:cNvPr id="1" name=""/>
+        <p:cNvGrpSpPr/>
+        <p:nvPr/>
+      </p:nvGrpSpPr>
+      <p:grpSpPr>
+        <a:xfrm>
+          <a:off x="0" y="0"/>
+          <a:ext cx="0" cy="0"/>
+          <a:chOff x="0" y="0"/>
+          <a:chExt cx="0" cy="0"/>
+        </a:xfrm>
+      </p:grpSpPr>
+      <p:sp>
+        <p:nvSpPr>
+          <p:cNvPr id="2" name="슬라이드 이미지 개체 틀 1"/>
+          <p:cNvSpPr>
+            <a:spLocks noGrp="1" noRot="1" noChangeAspect="1"/>
+          </p:cNvSpPr>
+          <p:nvPr>
+            <p:ph type="sldImg"/>
+          </p:nvPr>
+        </p:nvSpPr>
+        <p:spPr/>
+      </p:sp>
+      <p:sp>
+        <p:nvSpPr>
+          <p:cNvPr id="3" name="슬라이드 노트 개체 틀 2"/>
+          <p:cNvSpPr>
+            <a:spLocks noGrp="1"/>
+          </p:cNvSpPr>
+          <p:nvPr>
+            <p:ph type="body" idx="1"/>
+          </p:nvPr>
+        </p:nvSpPr>
+        <p:spPr/>
+        <p:txBody>
+          <a:bodyPr/>
+          <a:lstStyle/>
+          <a:p>
+            <a:r>
+              <a:rPr lang="en-US" altLang="ko-KR" dirty="0"/>
+              <a:t>https://www.youtube.com/watch?v=S1I4363aQz8&amp;t=134s</a:t>
+            </a:r>
+            <a:endParaRPr lang="ko-KR" altLang="en-US" dirty="0"/>
+          </a:p>
+        </p:txBody>
+      </p:sp>
+      <p:sp>
+        <p:nvSpPr>
+          <p:cNvPr id="4" name="슬라이드 번호 개체 틀 3"/>
+          <p:cNvSpPr>
+            <a:spLocks noGrp="1"/>
+          </p:cNvSpPr>
+          <p:nvPr>
+            <p:ph type="sldNum" sz="quarter" idx="5"/>
+          </p:nvPr>
+        </p:nvSpPr>
+        <p:spPr/>
+        <p:txBody>
+          <a:bodyPr/>
+          <a:lstStyle/>
+          <a:p>
+            <a:fld id="{353DFDED-2E9F-41DA-A9FA-780DFF41939C}" type="slidenum">
+              <a:rPr lang="ko-KR" altLang="en-US" smtClean="0"/>
+              <a:t>23</a:t>
+            </a:fld>
+            <a:endParaRPr lang="ko-KR" altLang="en-US"/>
+          </a:p>
+        </p:txBody>
+      </p:sp>
+    </p:spTree>
+    <p:extLst>
+      <p:ext uri="{BB962C8B-B14F-4D97-AF65-F5344CB8AC3E}">
+        <p14:creationId xmlns:p14="http://schemas.microsoft.com/office/powerpoint/2010/main" val="347610162"/>
+      </p:ext>
+    </p:extLst>
+  </p:cSld>
+  <p:clrMapOvr>
+    <a:masterClrMapping/>
+  </p:clrMapOvr>
+</p:notes>
+</file>
+
+<file path=ppt/notesSlides/notesSlide21.xml><?xml version="1.0" encoding="utf-8"?>
+<p:notes xmlns:a="http://schemas.openxmlformats.org/drawingml/2006/main" xmlns:r="http://schemas.openxmlformats.org/officeDocument/2006/relationships" xmlns:p="http://schemas.openxmlformats.org/presentationml/2006/main">
+  <p:cSld>
+    <p:spTree>
+      <p:nvGrpSpPr>
+        <p:cNvPr id="1" name=""/>
+        <p:cNvGrpSpPr/>
+        <p:nvPr/>
+      </p:nvGrpSpPr>
+      <p:grpSpPr>
+        <a:xfrm>
+          <a:off x="0" y="0"/>
+          <a:ext cx="0" cy="0"/>
+          <a:chOff x="0" y="0"/>
+          <a:chExt cx="0" cy="0"/>
+        </a:xfrm>
+      </p:grpSpPr>
+      <p:sp>
+        <p:nvSpPr>
+          <p:cNvPr id="2" name="슬라이드 이미지 개체 틀 1"/>
+          <p:cNvSpPr>
+            <a:spLocks noGrp="1" noRot="1" noChangeAspect="1"/>
+          </p:cNvSpPr>
+          <p:nvPr>
+            <p:ph type="sldImg"/>
+          </p:nvPr>
+        </p:nvSpPr>
+        <p:spPr/>
+      </p:sp>
+      <p:sp>
+        <p:nvSpPr>
+          <p:cNvPr id="3" name="슬라이드 노트 개체 틀 2"/>
+          <p:cNvSpPr>
+            <a:spLocks noGrp="1"/>
+          </p:cNvSpPr>
+          <p:nvPr>
+            <p:ph type="body" idx="1"/>
+          </p:nvPr>
+        </p:nvSpPr>
+        <p:spPr/>
+        <p:txBody>
+          <a:bodyPr/>
+          <a:lstStyle/>
+          <a:p>
+            <a:r>
+              <a:rPr lang="en-US" altLang="ko-KR" dirty="0"/>
+              <a:t>https://www.youtube.com/watch?v=S1I4363aQz8&amp;t=134s</a:t>
+            </a:r>
+            <a:endParaRPr lang="ko-KR" altLang="en-US" dirty="0"/>
+          </a:p>
+        </p:txBody>
+      </p:sp>
+      <p:sp>
+        <p:nvSpPr>
+          <p:cNvPr id="4" name="슬라이드 번호 개체 틀 3"/>
+          <p:cNvSpPr>
+            <a:spLocks noGrp="1"/>
+          </p:cNvSpPr>
+          <p:nvPr>
+            <p:ph type="sldNum" sz="quarter" idx="5"/>
+          </p:nvPr>
+        </p:nvSpPr>
+        <p:spPr/>
+        <p:txBody>
+          <a:bodyPr/>
+          <a:lstStyle/>
+          <a:p>
+            <a:fld id="{353DFDED-2E9F-41DA-A9FA-780DFF41939C}" type="slidenum">
+              <a:rPr lang="ko-KR" altLang="en-US" smtClean="0"/>
+              <a:t>24</a:t>
+            </a:fld>
+            <a:endParaRPr lang="ko-KR" altLang="en-US"/>
+          </a:p>
+        </p:txBody>
+      </p:sp>
+    </p:spTree>
+    <p:extLst>
+      <p:ext uri="{BB962C8B-B14F-4D97-AF65-F5344CB8AC3E}">
+        <p14:creationId xmlns:p14="http://schemas.microsoft.com/office/powerpoint/2010/main" val="4086721823"/>
+      </p:ext>
+    </p:extLst>
+  </p:cSld>
+  <p:clrMapOvr>
+    <a:masterClrMapping/>
+  </p:clrMapOvr>
+</p:notes>
+</file>
+
+<file path=ppt/notesSlides/notesSlide22.xml><?xml version="1.0" encoding="utf-8"?>
+<p:notes xmlns:a="http://schemas.openxmlformats.org/drawingml/2006/main" xmlns:r="http://schemas.openxmlformats.org/officeDocument/2006/relationships" xmlns:p="http://schemas.openxmlformats.org/presentationml/2006/main">
+  <p:cSld>
+    <p:spTree>
+      <p:nvGrpSpPr>
+        <p:cNvPr id="1" name=""/>
+        <p:cNvGrpSpPr/>
+        <p:nvPr/>
+      </p:nvGrpSpPr>
+      <p:grpSpPr>
+        <a:xfrm>
+          <a:off x="0" y="0"/>
+          <a:ext cx="0" cy="0"/>
+          <a:chOff x="0" y="0"/>
+          <a:chExt cx="0" cy="0"/>
+        </a:xfrm>
+      </p:grpSpPr>
+      <p:sp>
+        <p:nvSpPr>
+          <p:cNvPr id="2" name="슬라이드 이미지 개체 틀 1"/>
+          <p:cNvSpPr>
+            <a:spLocks noGrp="1" noRot="1" noChangeAspect="1"/>
+          </p:cNvSpPr>
+          <p:nvPr>
+            <p:ph type="sldImg"/>
+          </p:nvPr>
+        </p:nvSpPr>
+        <p:spPr/>
+      </p:sp>
+      <p:sp>
+        <p:nvSpPr>
+          <p:cNvPr id="3" name="슬라이드 노트 개체 틀 2"/>
+          <p:cNvSpPr>
+            <a:spLocks noGrp="1"/>
+          </p:cNvSpPr>
+          <p:nvPr>
+            <p:ph type="body" idx="1"/>
+          </p:nvPr>
+        </p:nvSpPr>
+        <p:spPr/>
+        <p:txBody>
+          <a:bodyPr/>
+          <a:lstStyle/>
+          <a:p>
+            <a:r>
+              <a:rPr lang="en-US" altLang="ko-KR" dirty="0"/>
+              <a:t>http://bigdata.dongguk.ac.kr/lectures/bigdata/_book/%EB%B9%85%EB%8D%B0%EC%9D%B4%ED%84%B0%EA%B0%9C%EC%9A%94.html#%EB%B9%85%EB%8D%B0%EC%9D%B4%ED%84%B0%EC%9D%98-%EB%B0%B0%EA%B2%BD</a:t>
+            </a:r>
+            <a:endParaRPr lang="ko-KR" altLang="en-US" dirty="0"/>
+          </a:p>
+        </p:txBody>
+      </p:sp>
+      <p:sp>
+        <p:nvSpPr>
+          <p:cNvPr id="4" name="슬라이드 번호 개체 틀 3"/>
+          <p:cNvSpPr>
+            <a:spLocks noGrp="1"/>
+          </p:cNvSpPr>
+          <p:nvPr>
+            <p:ph type="sldNum" sz="quarter" idx="5"/>
+          </p:nvPr>
+        </p:nvSpPr>
+        <p:spPr/>
+        <p:txBody>
+          <a:bodyPr/>
+          <a:lstStyle/>
+          <a:p>
+            <a:fld id="{353DFDED-2E9F-41DA-A9FA-780DFF41939C}" type="slidenum">
+              <a:rPr lang="ko-KR" altLang="en-US" smtClean="0"/>
+              <a:t>26</a:t>
+            </a:fld>
+            <a:endParaRPr lang="ko-KR" altLang="en-US"/>
+          </a:p>
+        </p:txBody>
+      </p:sp>
+    </p:spTree>
+    <p:extLst>
+      <p:ext uri="{BB962C8B-B14F-4D97-AF65-F5344CB8AC3E}">
+        <p14:creationId xmlns:p14="http://schemas.microsoft.com/office/powerpoint/2010/main" val="1264318133"/>
+      </p:ext>
+    </p:extLst>
+  </p:cSld>
+  <p:clrMapOvr>
+    <a:masterClrMapping/>
+  </p:clrMapOvr>
+</p:notes>
+</file>
+
+<file path=ppt/notesSlides/notesSlide23.xml><?xml version="1.0" encoding="utf-8"?>
+<p:notes xmlns:a="http://schemas.openxmlformats.org/drawingml/2006/main" xmlns:r="http://schemas.openxmlformats.org/officeDocument/2006/relationships" xmlns:p="http://schemas.openxmlformats.org/presentationml/2006/main">
+  <p:cSld>
+    <p:spTree>
+      <p:nvGrpSpPr>
+        <p:cNvPr id="1" name=""/>
+        <p:cNvGrpSpPr/>
+        <p:nvPr/>
+      </p:nvGrpSpPr>
+      <p:grpSpPr>
+        <a:xfrm>
+          <a:off x="0" y="0"/>
+          <a:ext cx="0" cy="0"/>
+          <a:chOff x="0" y="0"/>
+          <a:chExt cx="0" cy="0"/>
+        </a:xfrm>
+      </p:grpSpPr>
+      <p:sp>
+        <p:nvSpPr>
+          <p:cNvPr id="2" name="슬라이드 이미지 개체 틀 1"/>
+          <p:cNvSpPr>
+            <a:spLocks noGrp="1" noRot="1" noChangeAspect="1"/>
+          </p:cNvSpPr>
+          <p:nvPr>
+            <p:ph type="sldImg"/>
+          </p:nvPr>
+        </p:nvSpPr>
+        <p:spPr/>
+      </p:sp>
+      <p:sp>
+        <p:nvSpPr>
+          <p:cNvPr id="3" name="슬라이드 노트 개체 틀 2"/>
+          <p:cNvSpPr>
+            <a:spLocks noGrp="1"/>
+          </p:cNvSpPr>
+          <p:nvPr>
+            <p:ph type="body" idx="1"/>
+          </p:nvPr>
+        </p:nvSpPr>
+        <p:spPr/>
+        <p:txBody>
+          <a:bodyPr/>
+          <a:lstStyle/>
+          <a:p>
+            <a:r>
+              <a:rPr lang="en-US" altLang="ko-KR" dirty="0"/>
+              <a:t>https://www.youtube.com/watch?v=jFv0R5OyT5k</a:t>
+            </a:r>
+            <a:endParaRPr lang="ko-KR" altLang="en-US" dirty="0"/>
+          </a:p>
+        </p:txBody>
+      </p:sp>
+      <p:sp>
+        <p:nvSpPr>
+          <p:cNvPr id="4" name="슬라이드 번호 개체 틀 3"/>
+          <p:cNvSpPr>
+            <a:spLocks noGrp="1"/>
+          </p:cNvSpPr>
+          <p:nvPr>
+            <p:ph type="sldNum" sz="quarter" idx="5"/>
+          </p:nvPr>
+        </p:nvSpPr>
+        <p:spPr/>
+        <p:txBody>
+          <a:bodyPr/>
+          <a:lstStyle/>
+          <a:p>
+            <a:fld id="{353DFDED-2E9F-41DA-A9FA-780DFF41939C}" type="slidenum">
+              <a:rPr lang="ko-KR" altLang="en-US" smtClean="0"/>
+              <a:t>27</a:t>
+            </a:fld>
+            <a:endParaRPr lang="ko-KR" altLang="en-US"/>
+          </a:p>
+        </p:txBody>
+      </p:sp>
+    </p:spTree>
+    <p:extLst>
+      <p:ext uri="{BB962C8B-B14F-4D97-AF65-F5344CB8AC3E}">
+        <p14:creationId xmlns:p14="http://schemas.microsoft.com/office/powerpoint/2010/main" val="287982025"/>
+      </p:ext>
+    </p:extLst>
+  </p:cSld>
+  <p:clrMapOvr>
+    <a:masterClrMapping/>
+  </p:clrMapOvr>
+</p:notes>
+</file>
+
+<file path=ppt/notesSlides/notesSlide24.xml><?xml version="1.0" encoding="utf-8"?>
+<p:notes xmlns:a="http://schemas.openxmlformats.org/drawingml/2006/main" xmlns:r="http://schemas.openxmlformats.org/officeDocument/2006/relationships" xmlns:p="http://schemas.openxmlformats.org/presentationml/2006/main">
+  <p:cSld>
+    <p:spTree>
+      <p:nvGrpSpPr>
+        <p:cNvPr id="1" name=""/>
+        <p:cNvGrpSpPr/>
+        <p:nvPr/>
+      </p:nvGrpSpPr>
+      <p:grpSpPr>
+        <a:xfrm>
+          <a:off x="0" y="0"/>
+          <a:ext cx="0" cy="0"/>
+          <a:chOff x="0" y="0"/>
+          <a:chExt cx="0" cy="0"/>
+        </a:xfrm>
+      </p:grpSpPr>
+      <p:sp>
+        <p:nvSpPr>
+          <p:cNvPr id="2" name="슬라이드 이미지 개체 틀 1"/>
+          <p:cNvSpPr>
+            <a:spLocks noGrp="1" noRot="1" noChangeAspect="1"/>
+          </p:cNvSpPr>
+          <p:nvPr>
+            <p:ph type="sldImg"/>
+          </p:nvPr>
+        </p:nvSpPr>
+        <p:spPr/>
+      </p:sp>
+      <p:sp>
+        <p:nvSpPr>
+          <p:cNvPr id="3" name="슬라이드 노트 개체 틀 2"/>
+          <p:cNvSpPr>
+            <a:spLocks noGrp="1"/>
+          </p:cNvSpPr>
+          <p:nvPr>
+            <p:ph type="body" idx="1"/>
+          </p:nvPr>
+        </p:nvSpPr>
+        <p:spPr/>
+        <p:txBody>
+          <a:bodyPr/>
+          <a:lstStyle/>
+          <a:p>
+            <a:r>
+              <a:rPr lang="en-US" altLang="ko-KR" dirty="0"/>
+              <a:t>http://bigdata.dongguk.ac.kr/lectures/bigdata/_book/%EB%B9%85%EB%8D%B0%EC%9D%B4%ED%84%B0%EA%B0%9C%EC%9A%94.html#%EB%B9%85%EB%8D%B0%EC%9D%B4%ED%84%B0%EC%9D%98-%EB%B0%B0%EA%B2%BD</a:t>
+            </a:r>
+          </a:p>
+          <a:p>
+            <a:r>
+              <a:rPr lang="en-US" altLang="ko-KR" dirty="0"/>
+              <a:t>https://www.youtube.com/watch?v=jFv0R5OyT5k</a:t>
+            </a:r>
+            <a:endParaRPr lang="ko-KR" altLang="en-US" dirty="0"/>
+          </a:p>
+        </p:txBody>
+      </p:sp>
+      <p:sp>
+        <p:nvSpPr>
+          <p:cNvPr id="4" name="슬라이드 번호 개체 틀 3"/>
+          <p:cNvSpPr>
+            <a:spLocks noGrp="1"/>
+          </p:cNvSpPr>
+          <p:nvPr>
+            <p:ph type="sldNum" sz="quarter" idx="5"/>
+          </p:nvPr>
+        </p:nvSpPr>
+        <p:spPr/>
+        <p:txBody>
+          <a:bodyPr/>
+          <a:lstStyle/>
+          <a:p>
+            <a:fld id="{353DFDED-2E9F-41DA-A9FA-780DFF41939C}" type="slidenum">
+              <a:rPr lang="ko-KR" altLang="en-US" smtClean="0"/>
+              <a:t>28</a:t>
+            </a:fld>
+            <a:endParaRPr lang="ko-KR" altLang="en-US"/>
+          </a:p>
+        </p:txBody>
+      </p:sp>
+    </p:spTree>
+    <p:extLst>
+      <p:ext uri="{BB962C8B-B14F-4D97-AF65-F5344CB8AC3E}">
+        <p14:creationId xmlns:p14="http://schemas.microsoft.com/office/powerpoint/2010/main" val="4224231529"/>
+      </p:ext>
+    </p:extLst>
+  </p:cSld>
+  <p:clrMapOvr>
+    <a:masterClrMapping/>
+  </p:clrMapOvr>
+</p:notes>
+</file>
+
+<file path=ppt/notesSlides/notesSlide25.xml><?xml version="1.0" encoding="utf-8"?>
+<p:notes xmlns:a="http://schemas.openxmlformats.org/drawingml/2006/main" xmlns:r="http://schemas.openxmlformats.org/officeDocument/2006/relationships" xmlns:p="http://schemas.openxmlformats.org/presentationml/2006/main">
+  <p:cSld>
+    <p:spTree>
+      <p:nvGrpSpPr>
+        <p:cNvPr id="1" name=""/>
+        <p:cNvGrpSpPr/>
+        <p:nvPr/>
+      </p:nvGrpSpPr>
+      <p:grpSpPr>
+        <a:xfrm>
+          <a:off x="0" y="0"/>
+          <a:ext cx="0" cy="0"/>
+          <a:chOff x="0" y="0"/>
+          <a:chExt cx="0" cy="0"/>
+        </a:xfrm>
+      </p:grpSpPr>
+      <p:sp>
+        <p:nvSpPr>
+          <p:cNvPr id="2" name="슬라이드 이미지 개체 틀 1"/>
+          <p:cNvSpPr>
+            <a:spLocks noGrp="1" noRot="1" noChangeAspect="1"/>
+          </p:cNvSpPr>
+          <p:nvPr>
+            <p:ph type="sldImg"/>
+          </p:nvPr>
+        </p:nvSpPr>
+        <p:spPr/>
+      </p:sp>
+      <p:sp>
+        <p:nvSpPr>
+          <p:cNvPr id="3" name="슬라이드 노트 개체 틀 2"/>
+          <p:cNvSpPr>
+            <a:spLocks noGrp="1"/>
+          </p:cNvSpPr>
+          <p:nvPr>
+            <p:ph type="body" idx="1"/>
+          </p:nvPr>
+        </p:nvSpPr>
+        <p:spPr/>
+        <p:txBody>
+          <a:bodyPr/>
+          <a:lstStyle/>
+          <a:p>
+            <a:r>
+              <a:rPr lang="en-US" altLang="ko-KR" dirty="0"/>
+              <a:t>http://bigdata.dongguk.ac.kr/lectures/bigdata/_book/%EB%B9%85%EB%8D%B0%EC%9D%B4%ED%84%B0%EA%B0%9C%EC%9A%94.html#%EB%B9%85%EB%8D%B0%EC%9D%B4%ED%84%B0%EC%9D%98-%EB%B0%B0%EA%B2%BD</a:t>
+            </a:r>
+            <a:endParaRPr lang="ko-KR" altLang="en-US" dirty="0"/>
+          </a:p>
+        </p:txBody>
+      </p:sp>
+      <p:sp>
+        <p:nvSpPr>
+          <p:cNvPr id="4" name="슬라이드 번호 개체 틀 3"/>
+          <p:cNvSpPr>
+            <a:spLocks noGrp="1"/>
+          </p:cNvSpPr>
+          <p:nvPr>
+            <p:ph type="sldNum" sz="quarter" idx="5"/>
+          </p:nvPr>
+        </p:nvSpPr>
+        <p:spPr/>
+        <p:txBody>
+          <a:bodyPr/>
+          <a:lstStyle/>
+          <a:p>
+            <a:fld id="{353DFDED-2E9F-41DA-A9FA-780DFF41939C}" type="slidenum">
+              <a:rPr lang="ko-KR" altLang="en-US" smtClean="0"/>
+              <a:t>29</a:t>
+            </a:fld>
+            <a:endParaRPr lang="ko-KR" altLang="en-US"/>
+          </a:p>
+        </p:txBody>
+      </p:sp>
+    </p:spTree>
+    <p:extLst>
+      <p:ext uri="{BB962C8B-B14F-4D97-AF65-F5344CB8AC3E}">
+        <p14:creationId xmlns:p14="http://schemas.microsoft.com/office/powerpoint/2010/main" val="2263638940"/>
+      </p:ext>
+    </p:extLst>
+  </p:cSld>
+  <p:clrMapOvr>
+    <a:masterClrMapping/>
+  </p:clrMapOvr>
+</p:notes>
+</file>
+
+<file path=ppt/notesSlides/notesSlide26.xml><?xml version="1.0" encoding="utf-8"?>
+<p:notes xmlns:a="http://schemas.openxmlformats.org/drawingml/2006/main" xmlns:r="http://schemas.openxmlformats.org/officeDocument/2006/relationships" xmlns:p="http://schemas.openxmlformats.org/presentationml/2006/main">
+  <p:cSld>
+    <p:spTree>
+      <p:nvGrpSpPr>
+        <p:cNvPr id="1" name=""/>
+        <p:cNvGrpSpPr/>
+        <p:nvPr/>
+      </p:nvGrpSpPr>
+      <p:grpSpPr>
+        <a:xfrm>
+          <a:off x="0" y="0"/>
+          <a:ext cx="0" cy="0"/>
+          <a:chOff x="0" y="0"/>
+          <a:chExt cx="0" cy="0"/>
+        </a:xfrm>
+      </p:grpSpPr>
+      <p:sp>
+        <p:nvSpPr>
+          <p:cNvPr id="2" name="슬라이드 이미지 개체 틀 1"/>
+          <p:cNvSpPr>
+            <a:spLocks noGrp="1" noRot="1" noChangeAspect="1"/>
+          </p:cNvSpPr>
+          <p:nvPr>
+            <p:ph type="sldImg"/>
+          </p:nvPr>
+        </p:nvSpPr>
+        <p:spPr/>
+      </p:sp>
+      <p:sp>
+        <p:nvSpPr>
+          <p:cNvPr id="3" name="슬라이드 노트 개체 틀 2"/>
+          <p:cNvSpPr>
+            <a:spLocks noGrp="1"/>
+          </p:cNvSpPr>
+          <p:nvPr>
+            <p:ph type="body" idx="1"/>
+          </p:nvPr>
+        </p:nvSpPr>
+        <p:spPr/>
+        <p:txBody>
+          <a:bodyPr/>
+          <a:lstStyle/>
+          <a:p>
+            <a:r>
+              <a:rPr lang="en-US" altLang="ko-KR" dirty="0"/>
+              <a:t>https://blog.acronym.co.kr/621</a:t>
+            </a:r>
+          </a:p>
+          <a:p>
+            <a:r>
+              <a:rPr lang="en-US" altLang="ko-KR" dirty="0"/>
+              <a:t>https://www.youtube.com/watch?v=jFv0R5OyT5k</a:t>
+            </a:r>
+            <a:endParaRPr lang="ko-KR" altLang="en-US" dirty="0"/>
+          </a:p>
+        </p:txBody>
+      </p:sp>
+      <p:sp>
+        <p:nvSpPr>
+          <p:cNvPr id="4" name="슬라이드 번호 개체 틀 3"/>
+          <p:cNvSpPr>
+            <a:spLocks noGrp="1"/>
+          </p:cNvSpPr>
+          <p:nvPr>
+            <p:ph type="sldNum" sz="quarter" idx="5"/>
+          </p:nvPr>
+        </p:nvSpPr>
+        <p:spPr/>
+        <p:txBody>
+          <a:bodyPr/>
+          <a:lstStyle/>
+          <a:p>
+            <a:fld id="{353DFDED-2E9F-41DA-A9FA-780DFF41939C}" type="slidenum">
+              <a:rPr lang="ko-KR" altLang="en-US" smtClean="0"/>
+              <a:t>30</a:t>
+            </a:fld>
+            <a:endParaRPr lang="ko-KR" altLang="en-US"/>
+          </a:p>
+        </p:txBody>
+      </p:sp>
+    </p:spTree>
+    <p:extLst>
+      <p:ext uri="{BB962C8B-B14F-4D97-AF65-F5344CB8AC3E}">
+        <p14:creationId xmlns:p14="http://schemas.microsoft.com/office/powerpoint/2010/main" val="2680044791"/>
+      </p:ext>
+    </p:extLst>
+  </p:cSld>
+  <p:clrMapOvr>
+    <a:masterClrMapping/>
+  </p:clrMapOvr>
+</p:notes>
+</file>
+
+<file path=ppt/notesSlides/notesSlide27.xml><?xml version="1.0" encoding="utf-8"?>
+<p:notes xmlns:a="http://schemas.openxmlformats.org/drawingml/2006/main" xmlns:r="http://schemas.openxmlformats.org/officeDocument/2006/relationships" xmlns:p="http://schemas.openxmlformats.org/presentationml/2006/main">
+  <p:cSld>
+    <p:spTree>
+      <p:nvGrpSpPr>
+        <p:cNvPr id="1" name=""/>
+        <p:cNvGrpSpPr/>
+        <p:nvPr/>
+      </p:nvGrpSpPr>
+      <p:grpSpPr>
+        <a:xfrm>
+          <a:off x="0" y="0"/>
+          <a:ext cx="0" cy="0"/>
+          <a:chOff x="0" y="0"/>
+          <a:chExt cx="0" cy="0"/>
+        </a:xfrm>
+      </p:grpSpPr>
+      <p:sp>
+        <p:nvSpPr>
+          <p:cNvPr id="2" name="슬라이드 이미지 개체 틀 1"/>
+          <p:cNvSpPr>
+            <a:spLocks noGrp="1" noRot="1" noChangeAspect="1"/>
+          </p:cNvSpPr>
+          <p:nvPr>
+            <p:ph type="sldImg"/>
+          </p:nvPr>
+        </p:nvSpPr>
+        <p:spPr/>
+      </p:sp>
+      <p:sp>
+        <p:nvSpPr>
+          <p:cNvPr id="3" name="슬라이드 노트 개체 틀 2"/>
+          <p:cNvSpPr>
+            <a:spLocks noGrp="1"/>
+          </p:cNvSpPr>
+          <p:nvPr>
+            <p:ph type="body" idx="1"/>
+          </p:nvPr>
+        </p:nvSpPr>
+        <p:spPr/>
+        <p:txBody>
+          <a:bodyPr/>
+          <a:lstStyle/>
+          <a:p>
+            <a:r>
+              <a:rPr lang="en-US" altLang="ko-KR" dirty="0"/>
+              <a:t>https://huidea.tistory.com/233</a:t>
+            </a:r>
+            <a:endParaRPr lang="ko-KR" altLang="en-US" dirty="0"/>
+          </a:p>
+        </p:txBody>
+      </p:sp>
+      <p:sp>
+        <p:nvSpPr>
+          <p:cNvPr id="4" name="슬라이드 번호 개체 틀 3"/>
+          <p:cNvSpPr>
+            <a:spLocks noGrp="1"/>
+          </p:cNvSpPr>
+          <p:nvPr>
+            <p:ph type="sldNum" sz="quarter" idx="5"/>
+          </p:nvPr>
+        </p:nvSpPr>
+        <p:spPr/>
+        <p:txBody>
+          <a:bodyPr/>
+          <a:lstStyle/>
+          <a:p>
+            <a:fld id="{353DFDED-2E9F-41DA-A9FA-780DFF41939C}" type="slidenum">
+              <a:rPr lang="ko-KR" altLang="en-US" smtClean="0"/>
+              <a:t>31</a:t>
+            </a:fld>
+            <a:endParaRPr lang="ko-KR" altLang="en-US"/>
+          </a:p>
+        </p:txBody>
+      </p:sp>
+    </p:spTree>
+    <p:extLst>
+      <p:ext uri="{BB962C8B-B14F-4D97-AF65-F5344CB8AC3E}">
+        <p14:creationId xmlns:p14="http://schemas.microsoft.com/office/powerpoint/2010/main" val="955055704"/>
+      </p:ext>
+    </p:extLst>
+  </p:cSld>
+  <p:clrMapOvr>
+    <a:masterClrMapping/>
+  </p:clrMapOvr>
+</p:notes>
+</file>
+
+<file path=ppt/notesSlides/notesSlide28.xml><?xml version="1.0" encoding="utf-8"?>
+<p:notes xmlns:a="http://schemas.openxmlformats.org/drawingml/2006/main" xmlns:r="http://schemas.openxmlformats.org/officeDocument/2006/relationships" xmlns:p="http://schemas.openxmlformats.org/presentationml/2006/main">
+  <p:cSld>
+    <p:spTree>
+      <p:nvGrpSpPr>
+        <p:cNvPr id="1" name=""/>
+        <p:cNvGrpSpPr/>
+        <p:nvPr/>
+      </p:nvGrpSpPr>
+      <p:grpSpPr>
+        <a:xfrm>
+          <a:off x="0" y="0"/>
+          <a:ext cx="0" cy="0"/>
+          <a:chOff x="0" y="0"/>
+          <a:chExt cx="0" cy="0"/>
+        </a:xfrm>
+      </p:grpSpPr>
+      <p:sp>
+        <p:nvSpPr>
+          <p:cNvPr id="2" name="슬라이드 이미지 개체 틀 1"/>
+          <p:cNvSpPr>
+            <a:spLocks noGrp="1" noRot="1" noChangeAspect="1"/>
+          </p:cNvSpPr>
+          <p:nvPr>
+            <p:ph type="sldImg"/>
+          </p:nvPr>
+        </p:nvSpPr>
+        <p:spPr/>
+      </p:sp>
+      <p:sp>
+        <p:nvSpPr>
+          <p:cNvPr id="3" name="슬라이드 노트 개체 틀 2"/>
+          <p:cNvSpPr>
+            <a:spLocks noGrp="1"/>
+          </p:cNvSpPr>
+          <p:nvPr>
+            <p:ph type="body" idx="1"/>
+          </p:nvPr>
+        </p:nvSpPr>
+        <p:spPr/>
+        <p:txBody>
+          <a:bodyPr/>
+          <a:lstStyle/>
+          <a:p>
+            <a:r>
+              <a:rPr lang="en-US" altLang="ko-KR" dirty="0"/>
+              <a:t>https://huidea.tistory.com/233</a:t>
+            </a:r>
+            <a:endParaRPr lang="ko-KR" altLang="en-US" dirty="0"/>
+          </a:p>
+        </p:txBody>
+      </p:sp>
+      <p:sp>
+        <p:nvSpPr>
+          <p:cNvPr id="4" name="슬라이드 번호 개체 틀 3"/>
+          <p:cNvSpPr>
+            <a:spLocks noGrp="1"/>
+          </p:cNvSpPr>
+          <p:nvPr>
+            <p:ph type="sldNum" sz="quarter" idx="5"/>
+          </p:nvPr>
+        </p:nvSpPr>
+        <p:spPr/>
+        <p:txBody>
+          <a:bodyPr/>
+          <a:lstStyle/>
+          <a:p>
+            <a:fld id="{353DFDED-2E9F-41DA-A9FA-780DFF41939C}" type="slidenum">
+              <a:rPr lang="ko-KR" altLang="en-US" smtClean="0"/>
+              <a:t>32</a:t>
+            </a:fld>
+            <a:endParaRPr lang="ko-KR" altLang="en-US"/>
+          </a:p>
+        </p:txBody>
+      </p:sp>
+    </p:spTree>
+    <p:extLst>
+      <p:ext uri="{BB962C8B-B14F-4D97-AF65-F5344CB8AC3E}">
+        <p14:creationId xmlns:p14="http://schemas.microsoft.com/office/powerpoint/2010/main" val="158231153"/>
+      </p:ext>
+    </p:extLst>
+  </p:cSld>
+  <p:clrMapOvr>
+    <a:masterClrMapping/>
+  </p:clrMapOvr>
+</p:notes>
+</file>
+
+<file path=ppt/notesSlides/notesSlide29.xml><?xml version="1.0" encoding="utf-8"?>
+<p:notes xmlns:a="http://schemas.openxmlformats.org/drawingml/2006/main" xmlns:r="http://schemas.openxmlformats.org/officeDocument/2006/relationships" xmlns:p="http://schemas.openxmlformats.org/presentationml/2006/main">
+  <p:cSld>
+    <p:spTree>
+      <p:nvGrpSpPr>
+        <p:cNvPr id="1" name=""/>
+        <p:cNvGrpSpPr/>
+        <p:nvPr/>
+      </p:nvGrpSpPr>
+      <p:grpSpPr>
+        <a:xfrm>
+          <a:off x="0" y="0"/>
+          <a:ext cx="0" cy="0"/>
+          <a:chOff x="0" y="0"/>
+          <a:chExt cx="0" cy="0"/>
+        </a:xfrm>
+      </p:grpSpPr>
+      <p:sp>
+        <p:nvSpPr>
+          <p:cNvPr id="2" name="슬라이드 이미지 개체 틀 1"/>
+          <p:cNvSpPr>
+            <a:spLocks noGrp="1" noRot="1" noChangeAspect="1"/>
+          </p:cNvSpPr>
+          <p:nvPr>
+            <p:ph type="sldImg"/>
+          </p:nvPr>
+        </p:nvSpPr>
+        <p:spPr/>
+      </p:sp>
+      <p:sp>
+        <p:nvSpPr>
+          <p:cNvPr id="3" name="슬라이드 노트 개체 틀 2"/>
+          <p:cNvSpPr>
+            <a:spLocks noGrp="1"/>
+          </p:cNvSpPr>
+          <p:nvPr>
+            <p:ph type="body" idx="1"/>
+          </p:nvPr>
+        </p:nvSpPr>
+        <p:spPr/>
+        <p:txBody>
+          <a:bodyPr/>
+          <a:lstStyle/>
+          <a:p>
+            <a:r>
+              <a:rPr lang="en-US" altLang="ko-KR" dirty="0"/>
+              <a:t>https://huidea.tistory.com/233</a:t>
+            </a:r>
+            <a:endParaRPr lang="ko-KR" altLang="en-US" dirty="0"/>
+          </a:p>
+        </p:txBody>
+      </p:sp>
+      <p:sp>
+        <p:nvSpPr>
+          <p:cNvPr id="4" name="슬라이드 번호 개체 틀 3"/>
+          <p:cNvSpPr>
+            <a:spLocks noGrp="1"/>
+          </p:cNvSpPr>
+          <p:nvPr>
+            <p:ph type="sldNum" sz="quarter" idx="5"/>
+          </p:nvPr>
+        </p:nvSpPr>
+        <p:spPr/>
+        <p:txBody>
+          <a:bodyPr/>
+          <a:lstStyle/>
+          <a:p>
+            <a:fld id="{353DFDED-2E9F-41DA-A9FA-780DFF41939C}" type="slidenum">
+              <a:rPr lang="ko-KR" altLang="en-US" smtClean="0"/>
+              <a:t>33</a:t>
+            </a:fld>
+            <a:endParaRPr lang="ko-KR" altLang="en-US"/>
+          </a:p>
+        </p:txBody>
+      </p:sp>
+    </p:spTree>
+    <p:extLst>
+      <p:ext uri="{BB962C8B-B14F-4D97-AF65-F5344CB8AC3E}">
+        <p14:creationId xmlns:p14="http://schemas.microsoft.com/office/powerpoint/2010/main" val="1410373742"/>
+      </p:ext>
+    </p:extLst>
+  </p:cSld>
+  <p:clrMapOvr>
+    <a:masterClrMapping/>
+  </p:clrMapOvr>
+</p:notes>
+</file>
+
+<file path=ppt/notesSlides/notesSlide3.xml><?xml version="1.0" encoding="utf-8"?>
+<p:notes xmlns:a="http://schemas.openxmlformats.org/drawingml/2006/main" xmlns:r="http://schemas.openxmlformats.org/officeDocument/2006/relationships" xmlns:p="http://schemas.openxmlformats.org/presentationml/2006/main">
+  <p:cSld>
+    <p:spTree>
+      <p:nvGrpSpPr>
+        <p:cNvPr id="1" name=""/>
+        <p:cNvGrpSpPr/>
+        <p:nvPr/>
+      </p:nvGrpSpPr>
+      <p:grpSpPr>
+        <a:xfrm>
+          <a:off x="0" y="0"/>
+          <a:ext cx="0" cy="0"/>
+          <a:chOff x="0" y="0"/>
+          <a:chExt cx="0" cy="0"/>
+        </a:xfrm>
+      </p:grpSpPr>
+      <p:sp>
+        <p:nvSpPr>
+          <p:cNvPr id="2" name="슬라이드 이미지 개체 틀 1"/>
+          <p:cNvSpPr>
+            <a:spLocks noGrp="1" noRot="1" noChangeAspect="1"/>
+          </p:cNvSpPr>
+          <p:nvPr>
+            <p:ph type="sldImg"/>
+          </p:nvPr>
+        </p:nvSpPr>
+        <p:spPr/>
+      </p:sp>
+      <p:sp>
+        <p:nvSpPr>
+          <p:cNvPr id="3" name="슬라이드 노트 개체 틀 2"/>
+          <p:cNvSpPr>
+            <a:spLocks noGrp="1"/>
+          </p:cNvSpPr>
+          <p:nvPr>
+            <p:ph type="body" idx="1"/>
+          </p:nvPr>
+        </p:nvSpPr>
+        <p:spPr/>
+        <p:txBody>
+          <a:bodyPr/>
+          <a:lstStyle/>
+          <a:p>
+            <a:pPr marL="0" marR="0" lvl="0" indent="0" algn="l" defTabSz="914400" rtl="0" eaLnBrk="1" fontAlgn="auto" latinLnBrk="1" hangingPunct="1">
+              <a:lnSpc>
+                <a:spcPct val="100000"/>
+              </a:lnSpc>
+              <a:spcBef>
+                <a:spcPts val="0"/>
+              </a:spcBef>
+              <a:spcAft>
+                <a:spcPts val="0"/>
+              </a:spcAft>
+              <a:buClrTx/>
+              <a:buSzTx/>
+              <a:buFontTx/>
+              <a:buNone/>
+              <a:tabLst/>
+              <a:defRPr/>
+            </a:pPr>
+            <a:r>
+              <a:rPr lang="en-US" altLang="ko-KR" dirty="0"/>
+              <a:t>https://www.youtube.com/watch?v=jFv0R5OyT5k</a:t>
+            </a:r>
+            <a:endParaRPr lang="ko-KR" altLang="en-US"/>
+          </a:p>
+          <a:p>
+            <a:endParaRPr lang="ko-KR" altLang="en-US"/>
+          </a:p>
+        </p:txBody>
+      </p:sp>
+      <p:sp>
+        <p:nvSpPr>
+          <p:cNvPr id="4" name="슬라이드 번호 개체 틀 3"/>
+          <p:cNvSpPr>
+            <a:spLocks noGrp="1"/>
+          </p:cNvSpPr>
+          <p:nvPr>
+            <p:ph type="sldNum" sz="quarter" idx="5"/>
+          </p:nvPr>
+        </p:nvSpPr>
+        <p:spPr/>
+        <p:txBody>
+          <a:bodyPr/>
+          <a:lstStyle/>
+          <a:p>
+            <a:fld id="{353DFDED-2E9F-41DA-A9FA-780DFF41939C}" type="slidenum">
+              <a:rPr lang="ko-KR" altLang="en-US" smtClean="0"/>
+              <a:t>3</a:t>
+            </a:fld>
+            <a:endParaRPr lang="ko-KR" altLang="en-US"/>
+          </a:p>
+        </p:txBody>
+      </p:sp>
+    </p:spTree>
+    <p:extLst>
+      <p:ext uri="{BB962C8B-B14F-4D97-AF65-F5344CB8AC3E}">
+        <p14:creationId xmlns:p14="http://schemas.microsoft.com/office/powerpoint/2010/main" val="2683973534"/>
+      </p:ext>
+    </p:extLst>
+  </p:cSld>
+  <p:clrMapOvr>
+    <a:masterClrMapping/>
+  </p:clrMapOvr>
+</p:notes>
+</file>
+
+<file path=ppt/notesSlides/notesSlide30.xml><?xml version="1.0" encoding="utf-8"?>
+<p:notes xmlns:a="http://schemas.openxmlformats.org/drawingml/2006/main" xmlns:r="http://schemas.openxmlformats.org/officeDocument/2006/relationships" xmlns:p="http://schemas.openxmlformats.org/presentationml/2006/main">
+  <p:cSld>
+    <p:spTree>
+      <p:nvGrpSpPr>
+        <p:cNvPr id="1" name=""/>
+        <p:cNvGrpSpPr/>
+        <p:nvPr/>
+      </p:nvGrpSpPr>
+      <p:grpSpPr>
+        <a:xfrm>
+          <a:off x="0" y="0"/>
+          <a:ext cx="0" cy="0"/>
+          <a:chOff x="0" y="0"/>
+          <a:chExt cx="0" cy="0"/>
+        </a:xfrm>
+      </p:grpSpPr>
+      <p:sp>
+        <p:nvSpPr>
+          <p:cNvPr id="2" name="슬라이드 이미지 개체 틀 1"/>
+          <p:cNvSpPr>
+            <a:spLocks noGrp="1" noRot="1" noChangeAspect="1"/>
+          </p:cNvSpPr>
+          <p:nvPr>
+            <p:ph type="sldImg"/>
+          </p:nvPr>
+        </p:nvSpPr>
+        <p:spPr/>
+      </p:sp>
+      <p:sp>
+        <p:nvSpPr>
+          <p:cNvPr id="3" name="슬라이드 노트 개체 틀 2"/>
+          <p:cNvSpPr>
+            <a:spLocks noGrp="1"/>
+          </p:cNvSpPr>
+          <p:nvPr>
+            <p:ph type="body" idx="1"/>
+          </p:nvPr>
+        </p:nvSpPr>
+        <p:spPr/>
+        <p:txBody>
+          <a:bodyPr/>
+          <a:lstStyle/>
+          <a:p>
+            <a:r>
+              <a:rPr lang="en-US" altLang="ko-KR" dirty="0"/>
+              <a:t>https://huidea.tistory.com/233</a:t>
+            </a:r>
+            <a:endParaRPr lang="ko-KR" altLang="en-US" dirty="0"/>
+          </a:p>
+        </p:txBody>
+      </p:sp>
+      <p:sp>
+        <p:nvSpPr>
+          <p:cNvPr id="4" name="슬라이드 번호 개체 틀 3"/>
+          <p:cNvSpPr>
+            <a:spLocks noGrp="1"/>
+          </p:cNvSpPr>
+          <p:nvPr>
+            <p:ph type="sldNum" sz="quarter" idx="5"/>
+          </p:nvPr>
+        </p:nvSpPr>
+        <p:spPr/>
+        <p:txBody>
+          <a:bodyPr/>
+          <a:lstStyle/>
+          <a:p>
+            <a:fld id="{353DFDED-2E9F-41DA-A9FA-780DFF41939C}" type="slidenum">
+              <a:rPr lang="ko-KR" altLang="en-US" smtClean="0"/>
+              <a:t>34</a:t>
+            </a:fld>
+            <a:endParaRPr lang="ko-KR" altLang="en-US"/>
+          </a:p>
+        </p:txBody>
+      </p:sp>
+    </p:spTree>
+    <p:extLst>
+      <p:ext uri="{BB962C8B-B14F-4D97-AF65-F5344CB8AC3E}">
+        <p14:creationId xmlns:p14="http://schemas.microsoft.com/office/powerpoint/2010/main" val="204747547"/>
+      </p:ext>
+    </p:extLst>
+  </p:cSld>
+  <p:clrMapOvr>
+    <a:masterClrMapping/>
+  </p:clrMapOvr>
+</p:notes>
+</file>
+
+<file path=ppt/notesSlides/notesSlide4.xml><?xml version="1.0" encoding="utf-8"?>
+<p:notes xmlns:a="http://schemas.openxmlformats.org/drawingml/2006/main" xmlns:r="http://schemas.openxmlformats.org/officeDocument/2006/relationships" xmlns:p="http://schemas.openxmlformats.org/presentationml/2006/main">
+  <p:cSld>
+    <p:spTree>
+      <p:nvGrpSpPr>
         <p:cNvPr id="1" name="">
           <a:extLst>
             <a:ext uri="{FF2B5EF4-FFF2-40B4-BE49-F238E27FC236}">
@@ -626,887 +2830,7 @@
 </p:notes>
 </file>
 
-<file path=ppt/notesSlides/notesSlide10.xml><?xml version="1.0" encoding="utf-8"?>
-<p:notes xmlns:a="http://schemas.openxmlformats.org/drawingml/2006/main" xmlns:r="http://schemas.openxmlformats.org/officeDocument/2006/relationships" xmlns:p="http://schemas.openxmlformats.org/presentationml/2006/main">
-  <p:cSld>
-    <p:spTree>
-      <p:nvGrpSpPr>
-        <p:cNvPr id="1" name=""/>
-        <p:cNvGrpSpPr/>
-        <p:nvPr/>
-      </p:nvGrpSpPr>
-      <p:grpSpPr>
-        <a:xfrm>
-          <a:off x="0" y="0"/>
-          <a:ext cx="0" cy="0"/>
-          <a:chOff x="0" y="0"/>
-          <a:chExt cx="0" cy="0"/>
-        </a:xfrm>
-      </p:grpSpPr>
-      <p:sp>
-        <p:nvSpPr>
-          <p:cNvPr id="2" name="슬라이드 이미지 개체 틀 1"/>
-          <p:cNvSpPr>
-            <a:spLocks noGrp="1" noRot="1" noChangeAspect="1"/>
-          </p:cNvSpPr>
-          <p:nvPr>
-            <p:ph type="sldImg"/>
-          </p:nvPr>
-        </p:nvSpPr>
-        <p:spPr/>
-      </p:sp>
-      <p:sp>
-        <p:nvSpPr>
-          <p:cNvPr id="3" name="슬라이드 노트 개체 틀 2"/>
-          <p:cNvSpPr>
-            <a:spLocks noGrp="1"/>
-          </p:cNvSpPr>
-          <p:nvPr>
-            <p:ph type="body" idx="1"/>
-          </p:nvPr>
-        </p:nvSpPr>
-        <p:spPr/>
-        <p:txBody>
-          <a:bodyPr/>
-          <a:lstStyle/>
-          <a:p>
-            <a:r>
-              <a:rPr lang="en-US" altLang="ko-KR" dirty="0"/>
-              <a:t>https://learnx.tistory.com/entry/%ED%86%B5%EA%B3%84%EC%9D%98-%EA%B8%B0%EC%B4%88%EC%9D%B8-%ED%8F%89%EA%B7%A0-%EB%B6%84%EC%82%B0-%ED%91%9C%EC%A4%80%ED%8E%B8%EC%B0%A8</a:t>
-            </a:r>
-            <a:endParaRPr lang="ko-KR" altLang="en-US" dirty="0"/>
-          </a:p>
-        </p:txBody>
-      </p:sp>
-      <p:sp>
-        <p:nvSpPr>
-          <p:cNvPr id="4" name="슬라이드 번호 개체 틀 3"/>
-          <p:cNvSpPr>
-            <a:spLocks noGrp="1"/>
-          </p:cNvSpPr>
-          <p:nvPr>
-            <p:ph type="sldNum" sz="quarter" idx="5"/>
-          </p:nvPr>
-        </p:nvSpPr>
-        <p:spPr/>
-        <p:txBody>
-          <a:bodyPr/>
-          <a:lstStyle/>
-          <a:p>
-            <a:fld id="{353DFDED-2E9F-41DA-A9FA-780DFF41939C}" type="slidenum">
-              <a:rPr lang="ko-KR" altLang="en-US" smtClean="0"/>
-              <a:t>14</a:t>
-            </a:fld>
-            <a:endParaRPr lang="ko-KR" altLang="en-US"/>
-          </a:p>
-        </p:txBody>
-      </p:sp>
-    </p:spTree>
-    <p:extLst>
-      <p:ext uri="{BB962C8B-B14F-4D97-AF65-F5344CB8AC3E}">
-        <p14:creationId xmlns:p14="http://schemas.microsoft.com/office/powerpoint/2010/main" val="121878011"/>
-      </p:ext>
-    </p:extLst>
-  </p:cSld>
-  <p:clrMapOvr>
-    <a:masterClrMapping/>
-  </p:clrMapOvr>
-</p:notes>
-</file>
-
-<file path=ppt/notesSlides/notesSlide11.xml><?xml version="1.0" encoding="utf-8"?>
-<p:notes xmlns:a="http://schemas.openxmlformats.org/drawingml/2006/main" xmlns:r="http://schemas.openxmlformats.org/officeDocument/2006/relationships" xmlns:p="http://schemas.openxmlformats.org/presentationml/2006/main">
-  <p:cSld>
-    <p:spTree>
-      <p:nvGrpSpPr>
-        <p:cNvPr id="1" name=""/>
-        <p:cNvGrpSpPr/>
-        <p:nvPr/>
-      </p:nvGrpSpPr>
-      <p:grpSpPr>
-        <a:xfrm>
-          <a:off x="0" y="0"/>
-          <a:ext cx="0" cy="0"/>
-          <a:chOff x="0" y="0"/>
-          <a:chExt cx="0" cy="0"/>
-        </a:xfrm>
-      </p:grpSpPr>
-      <p:sp>
-        <p:nvSpPr>
-          <p:cNvPr id="2" name="슬라이드 이미지 개체 틀 1"/>
-          <p:cNvSpPr>
-            <a:spLocks noGrp="1" noRot="1" noChangeAspect="1"/>
-          </p:cNvSpPr>
-          <p:nvPr>
-            <p:ph type="sldImg"/>
-          </p:nvPr>
-        </p:nvSpPr>
-        <p:spPr/>
-      </p:sp>
-      <p:sp>
-        <p:nvSpPr>
-          <p:cNvPr id="3" name="슬라이드 노트 개체 틀 2"/>
-          <p:cNvSpPr>
-            <a:spLocks noGrp="1"/>
-          </p:cNvSpPr>
-          <p:nvPr>
-            <p:ph type="body" idx="1"/>
-          </p:nvPr>
-        </p:nvSpPr>
-        <p:spPr/>
-        <p:txBody>
-          <a:bodyPr/>
-          <a:lstStyle/>
-          <a:p>
-            <a:r>
-              <a:rPr lang="en-US" altLang="ko-KR" dirty="0"/>
-              <a:t>https://ko.khanacademy.org/math/statistics-probability/modeling-distributions-of-data/normal-distributions-library/a/normal-distributions-review</a:t>
-            </a:r>
-            <a:endParaRPr lang="ko-KR" altLang="en-US" dirty="0"/>
-          </a:p>
-        </p:txBody>
-      </p:sp>
-      <p:sp>
-        <p:nvSpPr>
-          <p:cNvPr id="4" name="슬라이드 번호 개체 틀 3"/>
-          <p:cNvSpPr>
-            <a:spLocks noGrp="1"/>
-          </p:cNvSpPr>
-          <p:nvPr>
-            <p:ph type="sldNum" sz="quarter" idx="5"/>
-          </p:nvPr>
-        </p:nvSpPr>
-        <p:spPr/>
-        <p:txBody>
-          <a:bodyPr/>
-          <a:lstStyle/>
-          <a:p>
-            <a:fld id="{353DFDED-2E9F-41DA-A9FA-780DFF41939C}" type="slidenum">
-              <a:rPr lang="ko-KR" altLang="en-US" smtClean="0"/>
-              <a:t>17</a:t>
-            </a:fld>
-            <a:endParaRPr lang="ko-KR" altLang="en-US"/>
-          </a:p>
-        </p:txBody>
-      </p:sp>
-    </p:spTree>
-    <p:extLst>
-      <p:ext uri="{BB962C8B-B14F-4D97-AF65-F5344CB8AC3E}">
-        <p14:creationId xmlns:p14="http://schemas.microsoft.com/office/powerpoint/2010/main" val="457903083"/>
-      </p:ext>
-    </p:extLst>
-  </p:cSld>
-  <p:clrMapOvr>
-    <a:masterClrMapping/>
-  </p:clrMapOvr>
-</p:notes>
-</file>
-
-<file path=ppt/notesSlides/notesSlide12.xml><?xml version="1.0" encoding="utf-8"?>
-<p:notes xmlns:a="http://schemas.openxmlformats.org/drawingml/2006/main" xmlns:r="http://schemas.openxmlformats.org/officeDocument/2006/relationships" xmlns:p="http://schemas.openxmlformats.org/presentationml/2006/main">
-  <p:cSld>
-    <p:spTree>
-      <p:nvGrpSpPr>
-        <p:cNvPr id="1" name=""/>
-        <p:cNvGrpSpPr/>
-        <p:nvPr/>
-      </p:nvGrpSpPr>
-      <p:grpSpPr>
-        <a:xfrm>
-          <a:off x="0" y="0"/>
-          <a:ext cx="0" cy="0"/>
-          <a:chOff x="0" y="0"/>
-          <a:chExt cx="0" cy="0"/>
-        </a:xfrm>
-      </p:grpSpPr>
-      <p:sp>
-        <p:nvSpPr>
-          <p:cNvPr id="2" name="슬라이드 이미지 개체 틀 1"/>
-          <p:cNvSpPr>
-            <a:spLocks noGrp="1" noRot="1" noChangeAspect="1"/>
-          </p:cNvSpPr>
-          <p:nvPr>
-            <p:ph type="sldImg"/>
-          </p:nvPr>
-        </p:nvSpPr>
-        <p:spPr/>
-      </p:sp>
-      <p:sp>
-        <p:nvSpPr>
-          <p:cNvPr id="3" name="슬라이드 노트 개체 틀 2"/>
-          <p:cNvSpPr>
-            <a:spLocks noGrp="1"/>
-          </p:cNvSpPr>
-          <p:nvPr>
-            <p:ph type="body" idx="1"/>
-          </p:nvPr>
-        </p:nvSpPr>
-        <p:spPr/>
-        <p:txBody>
-          <a:bodyPr/>
-          <a:lstStyle/>
-          <a:p>
-            <a:r>
-              <a:rPr lang="en-US" altLang="ko-KR" dirty="0"/>
-              <a:t>https://www.youtube.com/watch?v=S1I4363aQz8&amp;t=134s</a:t>
-            </a:r>
-            <a:endParaRPr lang="ko-KR" altLang="en-US" dirty="0"/>
-          </a:p>
-        </p:txBody>
-      </p:sp>
-      <p:sp>
-        <p:nvSpPr>
-          <p:cNvPr id="4" name="슬라이드 번호 개체 틀 3"/>
-          <p:cNvSpPr>
-            <a:spLocks noGrp="1"/>
-          </p:cNvSpPr>
-          <p:nvPr>
-            <p:ph type="sldNum" sz="quarter" idx="5"/>
-          </p:nvPr>
-        </p:nvSpPr>
-        <p:spPr/>
-        <p:txBody>
-          <a:bodyPr/>
-          <a:lstStyle/>
-          <a:p>
-            <a:fld id="{353DFDED-2E9F-41DA-A9FA-780DFF41939C}" type="slidenum">
-              <a:rPr lang="ko-KR" altLang="en-US" smtClean="0"/>
-              <a:t>18</a:t>
-            </a:fld>
-            <a:endParaRPr lang="ko-KR" altLang="en-US"/>
-          </a:p>
-        </p:txBody>
-      </p:sp>
-    </p:spTree>
-    <p:extLst>
-      <p:ext uri="{BB962C8B-B14F-4D97-AF65-F5344CB8AC3E}">
-        <p14:creationId xmlns:p14="http://schemas.microsoft.com/office/powerpoint/2010/main" val="321384134"/>
-      </p:ext>
-    </p:extLst>
-  </p:cSld>
-  <p:clrMapOvr>
-    <a:masterClrMapping/>
-  </p:clrMapOvr>
-</p:notes>
-</file>
-
-<file path=ppt/notesSlides/notesSlide13.xml><?xml version="1.0" encoding="utf-8"?>
-<p:notes xmlns:a="http://schemas.openxmlformats.org/drawingml/2006/main" xmlns:r="http://schemas.openxmlformats.org/officeDocument/2006/relationships" xmlns:p="http://schemas.openxmlformats.org/presentationml/2006/main">
-  <p:cSld>
-    <p:spTree>
-      <p:nvGrpSpPr>
-        <p:cNvPr id="1" name=""/>
-        <p:cNvGrpSpPr/>
-        <p:nvPr/>
-      </p:nvGrpSpPr>
-      <p:grpSpPr>
-        <a:xfrm>
-          <a:off x="0" y="0"/>
-          <a:ext cx="0" cy="0"/>
-          <a:chOff x="0" y="0"/>
-          <a:chExt cx="0" cy="0"/>
-        </a:xfrm>
-      </p:grpSpPr>
-      <p:sp>
-        <p:nvSpPr>
-          <p:cNvPr id="2" name="슬라이드 이미지 개체 틀 1"/>
-          <p:cNvSpPr>
-            <a:spLocks noGrp="1" noRot="1" noChangeAspect="1"/>
-          </p:cNvSpPr>
-          <p:nvPr>
-            <p:ph type="sldImg"/>
-          </p:nvPr>
-        </p:nvSpPr>
-        <p:spPr/>
-      </p:sp>
-      <p:sp>
-        <p:nvSpPr>
-          <p:cNvPr id="3" name="슬라이드 노트 개체 틀 2"/>
-          <p:cNvSpPr>
-            <a:spLocks noGrp="1"/>
-          </p:cNvSpPr>
-          <p:nvPr>
-            <p:ph type="body" idx="1"/>
-          </p:nvPr>
-        </p:nvSpPr>
-        <p:spPr/>
-        <p:txBody>
-          <a:bodyPr/>
-          <a:lstStyle/>
-          <a:p>
-            <a:r>
-              <a:rPr lang="en-US" altLang="ko-KR" dirty="0"/>
-              <a:t>https://www.youtube.com/watch?v=jFv0R5OyT5k</a:t>
-            </a:r>
-            <a:endParaRPr lang="ko-KR" altLang="en-US" dirty="0"/>
-          </a:p>
-        </p:txBody>
-      </p:sp>
-      <p:sp>
-        <p:nvSpPr>
-          <p:cNvPr id="4" name="슬라이드 번호 개체 틀 3"/>
-          <p:cNvSpPr>
-            <a:spLocks noGrp="1"/>
-          </p:cNvSpPr>
-          <p:nvPr>
-            <p:ph type="sldNum" sz="quarter" idx="5"/>
-          </p:nvPr>
-        </p:nvSpPr>
-        <p:spPr/>
-        <p:txBody>
-          <a:bodyPr/>
-          <a:lstStyle/>
-          <a:p>
-            <a:fld id="{353DFDED-2E9F-41DA-A9FA-780DFF41939C}" type="slidenum">
-              <a:rPr lang="ko-KR" altLang="en-US" smtClean="0"/>
-              <a:t>19</a:t>
-            </a:fld>
-            <a:endParaRPr lang="ko-KR" altLang="en-US"/>
-          </a:p>
-        </p:txBody>
-      </p:sp>
-    </p:spTree>
-    <p:extLst>
-      <p:ext uri="{BB962C8B-B14F-4D97-AF65-F5344CB8AC3E}">
-        <p14:creationId xmlns:p14="http://schemas.microsoft.com/office/powerpoint/2010/main" val="1162303717"/>
-      </p:ext>
-    </p:extLst>
-  </p:cSld>
-  <p:clrMapOvr>
-    <a:masterClrMapping/>
-  </p:clrMapOvr>
-</p:notes>
-</file>
-
-<file path=ppt/notesSlides/notesSlide14.xml><?xml version="1.0" encoding="utf-8"?>
-<p:notes xmlns:a="http://schemas.openxmlformats.org/drawingml/2006/main" xmlns:r="http://schemas.openxmlformats.org/officeDocument/2006/relationships" xmlns:p="http://schemas.openxmlformats.org/presentationml/2006/main">
-  <p:cSld>
-    <p:spTree>
-      <p:nvGrpSpPr>
-        <p:cNvPr id="1" name=""/>
-        <p:cNvGrpSpPr/>
-        <p:nvPr/>
-      </p:nvGrpSpPr>
-      <p:grpSpPr>
-        <a:xfrm>
-          <a:off x="0" y="0"/>
-          <a:ext cx="0" cy="0"/>
-          <a:chOff x="0" y="0"/>
-          <a:chExt cx="0" cy="0"/>
-        </a:xfrm>
-      </p:grpSpPr>
-      <p:sp>
-        <p:nvSpPr>
-          <p:cNvPr id="2" name="슬라이드 이미지 개체 틀 1"/>
-          <p:cNvSpPr>
-            <a:spLocks noGrp="1" noRot="1" noChangeAspect="1"/>
-          </p:cNvSpPr>
-          <p:nvPr>
-            <p:ph type="sldImg"/>
-          </p:nvPr>
-        </p:nvSpPr>
-        <p:spPr/>
-      </p:sp>
-      <p:sp>
-        <p:nvSpPr>
-          <p:cNvPr id="3" name="슬라이드 노트 개체 틀 2"/>
-          <p:cNvSpPr>
-            <a:spLocks noGrp="1"/>
-          </p:cNvSpPr>
-          <p:nvPr>
-            <p:ph type="body" idx="1"/>
-          </p:nvPr>
-        </p:nvSpPr>
-        <p:spPr/>
-        <p:txBody>
-          <a:bodyPr/>
-          <a:lstStyle/>
-          <a:p>
-            <a:r>
-              <a:rPr lang="en-US" altLang="ko-KR" dirty="0"/>
-              <a:t>https://www.youtube.com/watch?v=S1I4363aQz8&amp;t=134s</a:t>
-            </a:r>
-            <a:endParaRPr lang="ko-KR" altLang="en-US" dirty="0"/>
-          </a:p>
-        </p:txBody>
-      </p:sp>
-      <p:sp>
-        <p:nvSpPr>
-          <p:cNvPr id="4" name="슬라이드 번호 개체 틀 3"/>
-          <p:cNvSpPr>
-            <a:spLocks noGrp="1"/>
-          </p:cNvSpPr>
-          <p:nvPr>
-            <p:ph type="sldNum" sz="quarter" idx="5"/>
-          </p:nvPr>
-        </p:nvSpPr>
-        <p:spPr/>
-        <p:txBody>
-          <a:bodyPr/>
-          <a:lstStyle/>
-          <a:p>
-            <a:fld id="{353DFDED-2E9F-41DA-A9FA-780DFF41939C}" type="slidenum">
-              <a:rPr lang="ko-KR" altLang="en-US" smtClean="0"/>
-              <a:t>20</a:t>
-            </a:fld>
-            <a:endParaRPr lang="ko-KR" altLang="en-US"/>
-          </a:p>
-        </p:txBody>
-      </p:sp>
-    </p:spTree>
-    <p:extLst>
-      <p:ext uri="{BB962C8B-B14F-4D97-AF65-F5344CB8AC3E}">
-        <p14:creationId xmlns:p14="http://schemas.microsoft.com/office/powerpoint/2010/main" val="1898582164"/>
-      </p:ext>
-    </p:extLst>
-  </p:cSld>
-  <p:clrMapOvr>
-    <a:masterClrMapping/>
-  </p:clrMapOvr>
-</p:notes>
-</file>
-
-<file path=ppt/notesSlides/notesSlide15.xml><?xml version="1.0" encoding="utf-8"?>
-<p:notes xmlns:a="http://schemas.openxmlformats.org/drawingml/2006/main" xmlns:r="http://schemas.openxmlformats.org/officeDocument/2006/relationships" xmlns:p="http://schemas.openxmlformats.org/presentationml/2006/main">
-  <p:cSld>
-    <p:spTree>
-      <p:nvGrpSpPr>
-        <p:cNvPr id="1" name=""/>
-        <p:cNvGrpSpPr/>
-        <p:nvPr/>
-      </p:nvGrpSpPr>
-      <p:grpSpPr>
-        <a:xfrm>
-          <a:off x="0" y="0"/>
-          <a:ext cx="0" cy="0"/>
-          <a:chOff x="0" y="0"/>
-          <a:chExt cx="0" cy="0"/>
-        </a:xfrm>
-      </p:grpSpPr>
-      <p:sp>
-        <p:nvSpPr>
-          <p:cNvPr id="2" name="슬라이드 이미지 개체 틀 1"/>
-          <p:cNvSpPr>
-            <a:spLocks noGrp="1" noRot="1" noChangeAspect="1"/>
-          </p:cNvSpPr>
-          <p:nvPr>
-            <p:ph type="sldImg"/>
-          </p:nvPr>
-        </p:nvSpPr>
-        <p:spPr/>
-      </p:sp>
-      <p:sp>
-        <p:nvSpPr>
-          <p:cNvPr id="3" name="슬라이드 노트 개체 틀 2"/>
-          <p:cNvSpPr>
-            <a:spLocks noGrp="1"/>
-          </p:cNvSpPr>
-          <p:nvPr>
-            <p:ph type="body" idx="1"/>
-          </p:nvPr>
-        </p:nvSpPr>
-        <p:spPr/>
-        <p:txBody>
-          <a:bodyPr/>
-          <a:lstStyle/>
-          <a:p>
-            <a:r>
-              <a:rPr lang="en-US" altLang="ko-KR" dirty="0"/>
-              <a:t>https://www.youtube.com/watch?v=S1I4363aQz8&amp;t=134s</a:t>
-            </a:r>
-            <a:endParaRPr lang="ko-KR" altLang="en-US" dirty="0"/>
-          </a:p>
-        </p:txBody>
-      </p:sp>
-      <p:sp>
-        <p:nvSpPr>
-          <p:cNvPr id="4" name="슬라이드 번호 개체 틀 3"/>
-          <p:cNvSpPr>
-            <a:spLocks noGrp="1"/>
-          </p:cNvSpPr>
-          <p:nvPr>
-            <p:ph type="sldNum" sz="quarter" idx="5"/>
-          </p:nvPr>
-        </p:nvSpPr>
-        <p:spPr/>
-        <p:txBody>
-          <a:bodyPr/>
-          <a:lstStyle/>
-          <a:p>
-            <a:fld id="{353DFDED-2E9F-41DA-A9FA-780DFF41939C}" type="slidenum">
-              <a:rPr lang="ko-KR" altLang="en-US" smtClean="0"/>
-              <a:t>21</a:t>
-            </a:fld>
-            <a:endParaRPr lang="ko-KR" altLang="en-US"/>
-          </a:p>
-        </p:txBody>
-      </p:sp>
-    </p:spTree>
-    <p:extLst>
-      <p:ext uri="{BB962C8B-B14F-4D97-AF65-F5344CB8AC3E}">
-        <p14:creationId xmlns:p14="http://schemas.microsoft.com/office/powerpoint/2010/main" val="973360043"/>
-      </p:ext>
-    </p:extLst>
-  </p:cSld>
-  <p:clrMapOvr>
-    <a:masterClrMapping/>
-  </p:clrMapOvr>
-</p:notes>
-</file>
-
-<file path=ppt/notesSlides/notesSlide16.xml><?xml version="1.0" encoding="utf-8"?>
-<p:notes xmlns:a="http://schemas.openxmlformats.org/drawingml/2006/main" xmlns:r="http://schemas.openxmlformats.org/officeDocument/2006/relationships" xmlns:p="http://schemas.openxmlformats.org/presentationml/2006/main">
-  <p:cSld>
-    <p:spTree>
-      <p:nvGrpSpPr>
-        <p:cNvPr id="1" name=""/>
-        <p:cNvGrpSpPr/>
-        <p:nvPr/>
-      </p:nvGrpSpPr>
-      <p:grpSpPr>
-        <a:xfrm>
-          <a:off x="0" y="0"/>
-          <a:ext cx="0" cy="0"/>
-          <a:chOff x="0" y="0"/>
-          <a:chExt cx="0" cy="0"/>
-        </a:xfrm>
-      </p:grpSpPr>
-      <p:sp>
-        <p:nvSpPr>
-          <p:cNvPr id="2" name="슬라이드 이미지 개체 틀 1"/>
-          <p:cNvSpPr>
-            <a:spLocks noGrp="1" noRot="1" noChangeAspect="1"/>
-          </p:cNvSpPr>
-          <p:nvPr>
-            <p:ph type="sldImg"/>
-          </p:nvPr>
-        </p:nvSpPr>
-        <p:spPr/>
-      </p:sp>
-      <p:sp>
-        <p:nvSpPr>
-          <p:cNvPr id="3" name="슬라이드 노트 개체 틀 2"/>
-          <p:cNvSpPr>
-            <a:spLocks noGrp="1"/>
-          </p:cNvSpPr>
-          <p:nvPr>
-            <p:ph type="body" idx="1"/>
-          </p:nvPr>
-        </p:nvSpPr>
-        <p:spPr/>
-        <p:txBody>
-          <a:bodyPr/>
-          <a:lstStyle/>
-          <a:p>
-            <a:r>
-              <a:rPr lang="en-US" altLang="ko-KR" dirty="0"/>
-              <a:t>https://www.youtube.com/watch?v=S1I4363aQz8&amp;t=134s</a:t>
-            </a:r>
-            <a:endParaRPr lang="ko-KR" altLang="en-US" dirty="0"/>
-          </a:p>
-        </p:txBody>
-      </p:sp>
-      <p:sp>
-        <p:nvSpPr>
-          <p:cNvPr id="4" name="슬라이드 번호 개체 틀 3"/>
-          <p:cNvSpPr>
-            <a:spLocks noGrp="1"/>
-          </p:cNvSpPr>
-          <p:nvPr>
-            <p:ph type="sldNum" sz="quarter" idx="5"/>
-          </p:nvPr>
-        </p:nvSpPr>
-        <p:spPr/>
-        <p:txBody>
-          <a:bodyPr/>
-          <a:lstStyle/>
-          <a:p>
-            <a:fld id="{353DFDED-2E9F-41DA-A9FA-780DFF41939C}" type="slidenum">
-              <a:rPr lang="ko-KR" altLang="en-US" smtClean="0"/>
-              <a:t>22</a:t>
-            </a:fld>
-            <a:endParaRPr lang="ko-KR" altLang="en-US"/>
-          </a:p>
-        </p:txBody>
-      </p:sp>
-    </p:spTree>
-    <p:extLst>
-      <p:ext uri="{BB962C8B-B14F-4D97-AF65-F5344CB8AC3E}">
-        <p14:creationId xmlns:p14="http://schemas.microsoft.com/office/powerpoint/2010/main" val="215973123"/>
-      </p:ext>
-    </p:extLst>
-  </p:cSld>
-  <p:clrMapOvr>
-    <a:masterClrMapping/>
-  </p:clrMapOvr>
-</p:notes>
-</file>
-
-<file path=ppt/notesSlides/notesSlide17.xml><?xml version="1.0" encoding="utf-8"?>
-<p:notes xmlns:a="http://schemas.openxmlformats.org/drawingml/2006/main" xmlns:r="http://schemas.openxmlformats.org/officeDocument/2006/relationships" xmlns:p="http://schemas.openxmlformats.org/presentationml/2006/main">
-  <p:cSld>
-    <p:spTree>
-      <p:nvGrpSpPr>
-        <p:cNvPr id="1" name=""/>
-        <p:cNvGrpSpPr/>
-        <p:nvPr/>
-      </p:nvGrpSpPr>
-      <p:grpSpPr>
-        <a:xfrm>
-          <a:off x="0" y="0"/>
-          <a:ext cx="0" cy="0"/>
-          <a:chOff x="0" y="0"/>
-          <a:chExt cx="0" cy="0"/>
-        </a:xfrm>
-      </p:grpSpPr>
-      <p:sp>
-        <p:nvSpPr>
-          <p:cNvPr id="2" name="슬라이드 이미지 개체 틀 1"/>
-          <p:cNvSpPr>
-            <a:spLocks noGrp="1" noRot="1" noChangeAspect="1"/>
-          </p:cNvSpPr>
-          <p:nvPr>
-            <p:ph type="sldImg"/>
-          </p:nvPr>
-        </p:nvSpPr>
-        <p:spPr/>
-      </p:sp>
-      <p:sp>
-        <p:nvSpPr>
-          <p:cNvPr id="3" name="슬라이드 노트 개체 틀 2"/>
-          <p:cNvSpPr>
-            <a:spLocks noGrp="1"/>
-          </p:cNvSpPr>
-          <p:nvPr>
-            <p:ph type="body" idx="1"/>
-          </p:nvPr>
-        </p:nvSpPr>
-        <p:spPr/>
-        <p:txBody>
-          <a:bodyPr/>
-          <a:lstStyle/>
-          <a:p>
-            <a:r>
-              <a:rPr lang="en-US" altLang="ko-KR" dirty="0"/>
-              <a:t>https://www.youtube.com/watch?v=S1I4363aQz8&amp;t=134s</a:t>
-            </a:r>
-            <a:endParaRPr lang="ko-KR" altLang="en-US" dirty="0"/>
-          </a:p>
-        </p:txBody>
-      </p:sp>
-      <p:sp>
-        <p:nvSpPr>
-          <p:cNvPr id="4" name="슬라이드 번호 개체 틀 3"/>
-          <p:cNvSpPr>
-            <a:spLocks noGrp="1"/>
-          </p:cNvSpPr>
-          <p:nvPr>
-            <p:ph type="sldNum" sz="quarter" idx="5"/>
-          </p:nvPr>
-        </p:nvSpPr>
-        <p:spPr/>
-        <p:txBody>
-          <a:bodyPr/>
-          <a:lstStyle/>
-          <a:p>
-            <a:fld id="{353DFDED-2E9F-41DA-A9FA-780DFF41939C}" type="slidenum">
-              <a:rPr lang="ko-KR" altLang="en-US" smtClean="0"/>
-              <a:t>23</a:t>
-            </a:fld>
-            <a:endParaRPr lang="ko-KR" altLang="en-US"/>
-          </a:p>
-        </p:txBody>
-      </p:sp>
-    </p:spTree>
-    <p:extLst>
-      <p:ext uri="{BB962C8B-B14F-4D97-AF65-F5344CB8AC3E}">
-        <p14:creationId xmlns:p14="http://schemas.microsoft.com/office/powerpoint/2010/main" val="347610162"/>
-      </p:ext>
-    </p:extLst>
-  </p:cSld>
-  <p:clrMapOvr>
-    <a:masterClrMapping/>
-  </p:clrMapOvr>
-</p:notes>
-</file>
-
-<file path=ppt/notesSlides/notesSlide18.xml><?xml version="1.0" encoding="utf-8"?>
-<p:notes xmlns:a="http://schemas.openxmlformats.org/drawingml/2006/main" xmlns:r="http://schemas.openxmlformats.org/officeDocument/2006/relationships" xmlns:p="http://schemas.openxmlformats.org/presentationml/2006/main">
-  <p:cSld>
-    <p:spTree>
-      <p:nvGrpSpPr>
-        <p:cNvPr id="1" name=""/>
-        <p:cNvGrpSpPr/>
-        <p:nvPr/>
-      </p:nvGrpSpPr>
-      <p:grpSpPr>
-        <a:xfrm>
-          <a:off x="0" y="0"/>
-          <a:ext cx="0" cy="0"/>
-          <a:chOff x="0" y="0"/>
-          <a:chExt cx="0" cy="0"/>
-        </a:xfrm>
-      </p:grpSpPr>
-      <p:sp>
-        <p:nvSpPr>
-          <p:cNvPr id="2" name="슬라이드 이미지 개체 틀 1"/>
-          <p:cNvSpPr>
-            <a:spLocks noGrp="1" noRot="1" noChangeAspect="1"/>
-          </p:cNvSpPr>
-          <p:nvPr>
-            <p:ph type="sldImg"/>
-          </p:nvPr>
-        </p:nvSpPr>
-        <p:spPr/>
-      </p:sp>
-      <p:sp>
-        <p:nvSpPr>
-          <p:cNvPr id="3" name="슬라이드 노트 개체 틀 2"/>
-          <p:cNvSpPr>
-            <a:spLocks noGrp="1"/>
-          </p:cNvSpPr>
-          <p:nvPr>
-            <p:ph type="body" idx="1"/>
-          </p:nvPr>
-        </p:nvSpPr>
-        <p:spPr/>
-        <p:txBody>
-          <a:bodyPr/>
-          <a:lstStyle/>
-          <a:p>
-            <a:r>
-              <a:rPr lang="en-US" altLang="ko-KR" dirty="0"/>
-              <a:t>https://www.youtube.com/watch?v=S1I4363aQz8&amp;t=134s</a:t>
-            </a:r>
-            <a:endParaRPr lang="ko-KR" altLang="en-US" dirty="0"/>
-          </a:p>
-        </p:txBody>
-      </p:sp>
-      <p:sp>
-        <p:nvSpPr>
-          <p:cNvPr id="4" name="슬라이드 번호 개체 틀 3"/>
-          <p:cNvSpPr>
-            <a:spLocks noGrp="1"/>
-          </p:cNvSpPr>
-          <p:nvPr>
-            <p:ph type="sldNum" sz="quarter" idx="5"/>
-          </p:nvPr>
-        </p:nvSpPr>
-        <p:spPr/>
-        <p:txBody>
-          <a:bodyPr/>
-          <a:lstStyle/>
-          <a:p>
-            <a:fld id="{353DFDED-2E9F-41DA-A9FA-780DFF41939C}" type="slidenum">
-              <a:rPr lang="ko-KR" altLang="en-US" smtClean="0"/>
-              <a:t>24</a:t>
-            </a:fld>
-            <a:endParaRPr lang="ko-KR" altLang="en-US"/>
-          </a:p>
-        </p:txBody>
-      </p:sp>
-    </p:spTree>
-    <p:extLst>
-      <p:ext uri="{BB962C8B-B14F-4D97-AF65-F5344CB8AC3E}">
-        <p14:creationId xmlns:p14="http://schemas.microsoft.com/office/powerpoint/2010/main" val="4086721823"/>
-      </p:ext>
-    </p:extLst>
-  </p:cSld>
-  <p:clrMapOvr>
-    <a:masterClrMapping/>
-  </p:clrMapOvr>
-</p:notes>
-</file>
-
-<file path=ppt/notesSlides/notesSlide19.xml><?xml version="1.0" encoding="utf-8"?>
-<p:notes xmlns:a="http://schemas.openxmlformats.org/drawingml/2006/main" xmlns:r="http://schemas.openxmlformats.org/officeDocument/2006/relationships" xmlns:p="http://schemas.openxmlformats.org/presentationml/2006/main">
-  <p:cSld>
-    <p:spTree>
-      <p:nvGrpSpPr>
-        <p:cNvPr id="1" name=""/>
-        <p:cNvGrpSpPr/>
-        <p:nvPr/>
-      </p:nvGrpSpPr>
-      <p:grpSpPr>
-        <a:xfrm>
-          <a:off x="0" y="0"/>
-          <a:ext cx="0" cy="0"/>
-          <a:chOff x="0" y="0"/>
-          <a:chExt cx="0" cy="0"/>
-        </a:xfrm>
-      </p:grpSpPr>
-      <p:sp>
-        <p:nvSpPr>
-          <p:cNvPr id="2" name="슬라이드 이미지 개체 틀 1"/>
-          <p:cNvSpPr>
-            <a:spLocks noGrp="1" noRot="1" noChangeAspect="1"/>
-          </p:cNvSpPr>
-          <p:nvPr>
-            <p:ph type="sldImg"/>
-          </p:nvPr>
-        </p:nvSpPr>
-        <p:spPr/>
-      </p:sp>
-      <p:sp>
-        <p:nvSpPr>
-          <p:cNvPr id="3" name="슬라이드 노트 개체 틀 2"/>
-          <p:cNvSpPr>
-            <a:spLocks noGrp="1"/>
-          </p:cNvSpPr>
-          <p:nvPr>
-            <p:ph type="body" idx="1"/>
-          </p:nvPr>
-        </p:nvSpPr>
-        <p:spPr/>
-        <p:txBody>
-          <a:bodyPr/>
-          <a:lstStyle/>
-          <a:p>
-            <a:r>
-              <a:rPr lang="en-US" altLang="ko-KR" dirty="0"/>
-              <a:t>http://bigdata.dongguk.ac.kr/lectures/bigdata/_book/%EB%B9%85%EB%8D%B0%EC%9D%B4%ED%84%B0%EA%B0%9C%EC%9A%94.html#%EB%B9%85%EB%8D%B0%EC%9D%B4%ED%84%B0%EC%9D%98-%EB%B0%B0%EA%B2%BD</a:t>
-            </a:r>
-            <a:endParaRPr lang="ko-KR" altLang="en-US" dirty="0"/>
-          </a:p>
-        </p:txBody>
-      </p:sp>
-      <p:sp>
-        <p:nvSpPr>
-          <p:cNvPr id="4" name="슬라이드 번호 개체 틀 3"/>
-          <p:cNvSpPr>
-            <a:spLocks noGrp="1"/>
-          </p:cNvSpPr>
-          <p:nvPr>
-            <p:ph type="sldNum" sz="quarter" idx="5"/>
-          </p:nvPr>
-        </p:nvSpPr>
-        <p:spPr/>
-        <p:txBody>
-          <a:bodyPr/>
-          <a:lstStyle/>
-          <a:p>
-            <a:fld id="{353DFDED-2E9F-41DA-A9FA-780DFF41939C}" type="slidenum">
-              <a:rPr lang="ko-KR" altLang="en-US" smtClean="0"/>
-              <a:t>26</a:t>
-            </a:fld>
-            <a:endParaRPr lang="ko-KR" altLang="en-US"/>
-          </a:p>
-        </p:txBody>
-      </p:sp>
-    </p:spTree>
-    <p:extLst>
-      <p:ext uri="{BB962C8B-B14F-4D97-AF65-F5344CB8AC3E}">
-        <p14:creationId xmlns:p14="http://schemas.microsoft.com/office/powerpoint/2010/main" val="1264318133"/>
-      </p:ext>
-    </p:extLst>
-  </p:cSld>
-  <p:clrMapOvr>
-    <a:masterClrMapping/>
-  </p:clrMapOvr>
-</p:notes>
-</file>
-
-<file path=ppt/notesSlides/notesSlide2.xml><?xml version="1.0" encoding="utf-8"?>
+<file path=ppt/notesSlides/notesSlide5.xml><?xml version="1.0" encoding="utf-8"?>
 <p:notes xmlns:a="http://schemas.openxmlformats.org/drawingml/2006/main" xmlns:r="http://schemas.openxmlformats.org/officeDocument/2006/relationships" xmlns:p="http://schemas.openxmlformats.org/presentationml/2006/main">
   <p:cSld>
     <p:spTree>
@@ -1624,7 +2948,7 @@
 </p:notes>
 </file>
 
-<file path=ppt/notesSlides/notesSlide20.xml><?xml version="1.0" encoding="utf-8"?>
+<file path=ppt/notesSlides/notesSlide6.xml><?xml version="1.0" encoding="utf-8"?>
 <p:notes xmlns:a="http://schemas.openxmlformats.org/drawingml/2006/main" xmlns:r="http://schemas.openxmlformats.org/officeDocument/2006/relationships" xmlns:p="http://schemas.openxmlformats.org/presentationml/2006/main">
   <p:cSld>
     <p:spTree>
@@ -1670,7 +2994,13 @@
           <a:p>
             <a:r>
               <a:rPr lang="en-US" altLang="ko-KR" dirty="0"/>
-              <a:t>https://www.youtube.com/watch?v=jFv0R5OyT5k</a:t>
+              <a:t>https://specialscene.tistory.com/151</a:t>
+            </a:r>
+          </a:p>
+          <a:p>
+            <a:r>
+              <a:rPr lang="en-US" altLang="ko-KR"/>
+              <a:t>https://blog.naver.com/awess0me/222513273296</a:t>
             </a:r>
             <a:endParaRPr lang="ko-KR" altLang="en-US" dirty="0"/>
           </a:p>
@@ -1693,728 +3023,6 @@
           <a:p>
             <a:fld id="{353DFDED-2E9F-41DA-A9FA-780DFF41939C}" type="slidenum">
               <a:rPr lang="ko-KR" altLang="en-US" smtClean="0"/>
-              <a:t>27</a:t>
-            </a:fld>
-            <a:endParaRPr lang="ko-KR" altLang="en-US"/>
-          </a:p>
-        </p:txBody>
-      </p:sp>
-    </p:spTree>
-    <p:extLst>
-      <p:ext uri="{BB962C8B-B14F-4D97-AF65-F5344CB8AC3E}">
-        <p14:creationId xmlns:p14="http://schemas.microsoft.com/office/powerpoint/2010/main" val="287982025"/>
-      </p:ext>
-    </p:extLst>
-  </p:cSld>
-  <p:clrMapOvr>
-    <a:masterClrMapping/>
-  </p:clrMapOvr>
-</p:notes>
-</file>
-
-<file path=ppt/notesSlides/notesSlide21.xml><?xml version="1.0" encoding="utf-8"?>
-<p:notes xmlns:a="http://schemas.openxmlformats.org/drawingml/2006/main" xmlns:r="http://schemas.openxmlformats.org/officeDocument/2006/relationships" xmlns:p="http://schemas.openxmlformats.org/presentationml/2006/main">
-  <p:cSld>
-    <p:spTree>
-      <p:nvGrpSpPr>
-        <p:cNvPr id="1" name=""/>
-        <p:cNvGrpSpPr/>
-        <p:nvPr/>
-      </p:nvGrpSpPr>
-      <p:grpSpPr>
-        <a:xfrm>
-          <a:off x="0" y="0"/>
-          <a:ext cx="0" cy="0"/>
-          <a:chOff x="0" y="0"/>
-          <a:chExt cx="0" cy="0"/>
-        </a:xfrm>
-      </p:grpSpPr>
-      <p:sp>
-        <p:nvSpPr>
-          <p:cNvPr id="2" name="슬라이드 이미지 개체 틀 1"/>
-          <p:cNvSpPr>
-            <a:spLocks noGrp="1" noRot="1" noChangeAspect="1"/>
-          </p:cNvSpPr>
-          <p:nvPr>
-            <p:ph type="sldImg"/>
-          </p:nvPr>
-        </p:nvSpPr>
-        <p:spPr/>
-      </p:sp>
-      <p:sp>
-        <p:nvSpPr>
-          <p:cNvPr id="3" name="슬라이드 노트 개체 틀 2"/>
-          <p:cNvSpPr>
-            <a:spLocks noGrp="1"/>
-          </p:cNvSpPr>
-          <p:nvPr>
-            <p:ph type="body" idx="1"/>
-          </p:nvPr>
-        </p:nvSpPr>
-        <p:spPr/>
-        <p:txBody>
-          <a:bodyPr/>
-          <a:lstStyle/>
-          <a:p>
-            <a:r>
-              <a:rPr lang="en-US" altLang="ko-KR" dirty="0"/>
-              <a:t>http://bigdata.dongguk.ac.kr/lectures/bigdata/_book/%EB%B9%85%EB%8D%B0%EC%9D%B4%ED%84%B0%EA%B0%9C%EC%9A%94.html#%EB%B9%85%EB%8D%B0%EC%9D%B4%ED%84%B0%EC%9D%98-%EB%B0%B0%EA%B2%BD</a:t>
-            </a:r>
-          </a:p>
-          <a:p>
-            <a:r>
-              <a:rPr lang="en-US" altLang="ko-KR" dirty="0"/>
-              <a:t>https://www.youtube.com/watch?v=jFv0R5OyT5k</a:t>
-            </a:r>
-            <a:endParaRPr lang="ko-KR" altLang="en-US" dirty="0"/>
-          </a:p>
-        </p:txBody>
-      </p:sp>
-      <p:sp>
-        <p:nvSpPr>
-          <p:cNvPr id="4" name="슬라이드 번호 개체 틀 3"/>
-          <p:cNvSpPr>
-            <a:spLocks noGrp="1"/>
-          </p:cNvSpPr>
-          <p:nvPr>
-            <p:ph type="sldNum" sz="quarter" idx="5"/>
-          </p:nvPr>
-        </p:nvSpPr>
-        <p:spPr/>
-        <p:txBody>
-          <a:bodyPr/>
-          <a:lstStyle/>
-          <a:p>
-            <a:fld id="{353DFDED-2E9F-41DA-A9FA-780DFF41939C}" type="slidenum">
-              <a:rPr lang="ko-KR" altLang="en-US" smtClean="0"/>
-              <a:t>28</a:t>
-            </a:fld>
-            <a:endParaRPr lang="ko-KR" altLang="en-US"/>
-          </a:p>
-        </p:txBody>
-      </p:sp>
-    </p:spTree>
-    <p:extLst>
-      <p:ext uri="{BB962C8B-B14F-4D97-AF65-F5344CB8AC3E}">
-        <p14:creationId xmlns:p14="http://schemas.microsoft.com/office/powerpoint/2010/main" val="4224231529"/>
-      </p:ext>
-    </p:extLst>
-  </p:cSld>
-  <p:clrMapOvr>
-    <a:masterClrMapping/>
-  </p:clrMapOvr>
-</p:notes>
-</file>
-
-<file path=ppt/notesSlides/notesSlide22.xml><?xml version="1.0" encoding="utf-8"?>
-<p:notes xmlns:a="http://schemas.openxmlformats.org/drawingml/2006/main" xmlns:r="http://schemas.openxmlformats.org/officeDocument/2006/relationships" xmlns:p="http://schemas.openxmlformats.org/presentationml/2006/main">
-  <p:cSld>
-    <p:spTree>
-      <p:nvGrpSpPr>
-        <p:cNvPr id="1" name=""/>
-        <p:cNvGrpSpPr/>
-        <p:nvPr/>
-      </p:nvGrpSpPr>
-      <p:grpSpPr>
-        <a:xfrm>
-          <a:off x="0" y="0"/>
-          <a:ext cx="0" cy="0"/>
-          <a:chOff x="0" y="0"/>
-          <a:chExt cx="0" cy="0"/>
-        </a:xfrm>
-      </p:grpSpPr>
-      <p:sp>
-        <p:nvSpPr>
-          <p:cNvPr id="2" name="슬라이드 이미지 개체 틀 1"/>
-          <p:cNvSpPr>
-            <a:spLocks noGrp="1" noRot="1" noChangeAspect="1"/>
-          </p:cNvSpPr>
-          <p:nvPr>
-            <p:ph type="sldImg"/>
-          </p:nvPr>
-        </p:nvSpPr>
-        <p:spPr/>
-      </p:sp>
-      <p:sp>
-        <p:nvSpPr>
-          <p:cNvPr id="3" name="슬라이드 노트 개체 틀 2"/>
-          <p:cNvSpPr>
-            <a:spLocks noGrp="1"/>
-          </p:cNvSpPr>
-          <p:nvPr>
-            <p:ph type="body" idx="1"/>
-          </p:nvPr>
-        </p:nvSpPr>
-        <p:spPr/>
-        <p:txBody>
-          <a:bodyPr/>
-          <a:lstStyle/>
-          <a:p>
-            <a:r>
-              <a:rPr lang="en-US" altLang="ko-KR" dirty="0"/>
-              <a:t>http://bigdata.dongguk.ac.kr/lectures/bigdata/_book/%EB%B9%85%EB%8D%B0%EC%9D%B4%ED%84%B0%EA%B0%9C%EC%9A%94.html#%EB%B9%85%EB%8D%B0%EC%9D%B4%ED%84%B0%EC%9D%98-%EB%B0%B0%EA%B2%BD</a:t>
-            </a:r>
-            <a:endParaRPr lang="ko-KR" altLang="en-US" dirty="0"/>
-          </a:p>
-        </p:txBody>
-      </p:sp>
-      <p:sp>
-        <p:nvSpPr>
-          <p:cNvPr id="4" name="슬라이드 번호 개체 틀 3"/>
-          <p:cNvSpPr>
-            <a:spLocks noGrp="1"/>
-          </p:cNvSpPr>
-          <p:nvPr>
-            <p:ph type="sldNum" sz="quarter" idx="5"/>
-          </p:nvPr>
-        </p:nvSpPr>
-        <p:spPr/>
-        <p:txBody>
-          <a:bodyPr/>
-          <a:lstStyle/>
-          <a:p>
-            <a:fld id="{353DFDED-2E9F-41DA-A9FA-780DFF41939C}" type="slidenum">
-              <a:rPr lang="ko-KR" altLang="en-US" smtClean="0"/>
-              <a:t>29</a:t>
-            </a:fld>
-            <a:endParaRPr lang="ko-KR" altLang="en-US"/>
-          </a:p>
-        </p:txBody>
-      </p:sp>
-    </p:spTree>
-    <p:extLst>
-      <p:ext uri="{BB962C8B-B14F-4D97-AF65-F5344CB8AC3E}">
-        <p14:creationId xmlns:p14="http://schemas.microsoft.com/office/powerpoint/2010/main" val="2263638940"/>
-      </p:ext>
-    </p:extLst>
-  </p:cSld>
-  <p:clrMapOvr>
-    <a:masterClrMapping/>
-  </p:clrMapOvr>
-</p:notes>
-</file>
-
-<file path=ppt/notesSlides/notesSlide23.xml><?xml version="1.0" encoding="utf-8"?>
-<p:notes xmlns:a="http://schemas.openxmlformats.org/drawingml/2006/main" xmlns:r="http://schemas.openxmlformats.org/officeDocument/2006/relationships" xmlns:p="http://schemas.openxmlformats.org/presentationml/2006/main">
-  <p:cSld>
-    <p:spTree>
-      <p:nvGrpSpPr>
-        <p:cNvPr id="1" name=""/>
-        <p:cNvGrpSpPr/>
-        <p:nvPr/>
-      </p:nvGrpSpPr>
-      <p:grpSpPr>
-        <a:xfrm>
-          <a:off x="0" y="0"/>
-          <a:ext cx="0" cy="0"/>
-          <a:chOff x="0" y="0"/>
-          <a:chExt cx="0" cy="0"/>
-        </a:xfrm>
-      </p:grpSpPr>
-      <p:sp>
-        <p:nvSpPr>
-          <p:cNvPr id="2" name="슬라이드 이미지 개체 틀 1"/>
-          <p:cNvSpPr>
-            <a:spLocks noGrp="1" noRot="1" noChangeAspect="1"/>
-          </p:cNvSpPr>
-          <p:nvPr>
-            <p:ph type="sldImg"/>
-          </p:nvPr>
-        </p:nvSpPr>
-        <p:spPr/>
-      </p:sp>
-      <p:sp>
-        <p:nvSpPr>
-          <p:cNvPr id="3" name="슬라이드 노트 개체 틀 2"/>
-          <p:cNvSpPr>
-            <a:spLocks noGrp="1"/>
-          </p:cNvSpPr>
-          <p:nvPr>
-            <p:ph type="body" idx="1"/>
-          </p:nvPr>
-        </p:nvSpPr>
-        <p:spPr/>
-        <p:txBody>
-          <a:bodyPr/>
-          <a:lstStyle/>
-          <a:p>
-            <a:r>
-              <a:rPr lang="en-US" altLang="ko-KR" dirty="0"/>
-              <a:t>https://blog.acronym.co.kr/621</a:t>
-            </a:r>
-          </a:p>
-          <a:p>
-            <a:r>
-              <a:rPr lang="en-US" altLang="ko-KR" dirty="0"/>
-              <a:t>https://www.youtube.com/watch?v=jFv0R5OyT5k</a:t>
-            </a:r>
-            <a:endParaRPr lang="ko-KR" altLang="en-US" dirty="0"/>
-          </a:p>
-        </p:txBody>
-      </p:sp>
-      <p:sp>
-        <p:nvSpPr>
-          <p:cNvPr id="4" name="슬라이드 번호 개체 틀 3"/>
-          <p:cNvSpPr>
-            <a:spLocks noGrp="1"/>
-          </p:cNvSpPr>
-          <p:nvPr>
-            <p:ph type="sldNum" sz="quarter" idx="5"/>
-          </p:nvPr>
-        </p:nvSpPr>
-        <p:spPr/>
-        <p:txBody>
-          <a:bodyPr/>
-          <a:lstStyle/>
-          <a:p>
-            <a:fld id="{353DFDED-2E9F-41DA-A9FA-780DFF41939C}" type="slidenum">
-              <a:rPr lang="ko-KR" altLang="en-US" smtClean="0"/>
-              <a:t>30</a:t>
-            </a:fld>
-            <a:endParaRPr lang="ko-KR" altLang="en-US"/>
-          </a:p>
-        </p:txBody>
-      </p:sp>
-    </p:spTree>
-    <p:extLst>
-      <p:ext uri="{BB962C8B-B14F-4D97-AF65-F5344CB8AC3E}">
-        <p14:creationId xmlns:p14="http://schemas.microsoft.com/office/powerpoint/2010/main" val="2680044791"/>
-      </p:ext>
-    </p:extLst>
-  </p:cSld>
-  <p:clrMapOvr>
-    <a:masterClrMapping/>
-  </p:clrMapOvr>
-</p:notes>
-</file>
-
-<file path=ppt/notesSlides/notesSlide24.xml><?xml version="1.0" encoding="utf-8"?>
-<p:notes xmlns:a="http://schemas.openxmlformats.org/drawingml/2006/main" xmlns:r="http://schemas.openxmlformats.org/officeDocument/2006/relationships" xmlns:p="http://schemas.openxmlformats.org/presentationml/2006/main">
-  <p:cSld>
-    <p:spTree>
-      <p:nvGrpSpPr>
-        <p:cNvPr id="1" name=""/>
-        <p:cNvGrpSpPr/>
-        <p:nvPr/>
-      </p:nvGrpSpPr>
-      <p:grpSpPr>
-        <a:xfrm>
-          <a:off x="0" y="0"/>
-          <a:ext cx="0" cy="0"/>
-          <a:chOff x="0" y="0"/>
-          <a:chExt cx="0" cy="0"/>
-        </a:xfrm>
-      </p:grpSpPr>
-      <p:sp>
-        <p:nvSpPr>
-          <p:cNvPr id="2" name="슬라이드 이미지 개체 틀 1"/>
-          <p:cNvSpPr>
-            <a:spLocks noGrp="1" noRot="1" noChangeAspect="1"/>
-          </p:cNvSpPr>
-          <p:nvPr>
-            <p:ph type="sldImg"/>
-          </p:nvPr>
-        </p:nvSpPr>
-        <p:spPr/>
-      </p:sp>
-      <p:sp>
-        <p:nvSpPr>
-          <p:cNvPr id="3" name="슬라이드 노트 개체 틀 2"/>
-          <p:cNvSpPr>
-            <a:spLocks noGrp="1"/>
-          </p:cNvSpPr>
-          <p:nvPr>
-            <p:ph type="body" idx="1"/>
-          </p:nvPr>
-        </p:nvSpPr>
-        <p:spPr/>
-        <p:txBody>
-          <a:bodyPr/>
-          <a:lstStyle/>
-          <a:p>
-            <a:r>
-              <a:rPr lang="en-US" altLang="ko-KR" dirty="0"/>
-              <a:t>https://huidea.tistory.com/233</a:t>
-            </a:r>
-            <a:endParaRPr lang="ko-KR" altLang="en-US" dirty="0"/>
-          </a:p>
-        </p:txBody>
-      </p:sp>
-      <p:sp>
-        <p:nvSpPr>
-          <p:cNvPr id="4" name="슬라이드 번호 개체 틀 3"/>
-          <p:cNvSpPr>
-            <a:spLocks noGrp="1"/>
-          </p:cNvSpPr>
-          <p:nvPr>
-            <p:ph type="sldNum" sz="quarter" idx="5"/>
-          </p:nvPr>
-        </p:nvSpPr>
-        <p:spPr/>
-        <p:txBody>
-          <a:bodyPr/>
-          <a:lstStyle/>
-          <a:p>
-            <a:fld id="{353DFDED-2E9F-41DA-A9FA-780DFF41939C}" type="slidenum">
-              <a:rPr lang="ko-KR" altLang="en-US" smtClean="0"/>
-              <a:t>31</a:t>
-            </a:fld>
-            <a:endParaRPr lang="ko-KR" altLang="en-US"/>
-          </a:p>
-        </p:txBody>
-      </p:sp>
-    </p:spTree>
-    <p:extLst>
-      <p:ext uri="{BB962C8B-B14F-4D97-AF65-F5344CB8AC3E}">
-        <p14:creationId xmlns:p14="http://schemas.microsoft.com/office/powerpoint/2010/main" val="955055704"/>
-      </p:ext>
-    </p:extLst>
-  </p:cSld>
-  <p:clrMapOvr>
-    <a:masterClrMapping/>
-  </p:clrMapOvr>
-</p:notes>
-</file>
-
-<file path=ppt/notesSlides/notesSlide25.xml><?xml version="1.0" encoding="utf-8"?>
-<p:notes xmlns:a="http://schemas.openxmlformats.org/drawingml/2006/main" xmlns:r="http://schemas.openxmlformats.org/officeDocument/2006/relationships" xmlns:p="http://schemas.openxmlformats.org/presentationml/2006/main">
-  <p:cSld>
-    <p:spTree>
-      <p:nvGrpSpPr>
-        <p:cNvPr id="1" name=""/>
-        <p:cNvGrpSpPr/>
-        <p:nvPr/>
-      </p:nvGrpSpPr>
-      <p:grpSpPr>
-        <a:xfrm>
-          <a:off x="0" y="0"/>
-          <a:ext cx="0" cy="0"/>
-          <a:chOff x="0" y="0"/>
-          <a:chExt cx="0" cy="0"/>
-        </a:xfrm>
-      </p:grpSpPr>
-      <p:sp>
-        <p:nvSpPr>
-          <p:cNvPr id="2" name="슬라이드 이미지 개체 틀 1"/>
-          <p:cNvSpPr>
-            <a:spLocks noGrp="1" noRot="1" noChangeAspect="1"/>
-          </p:cNvSpPr>
-          <p:nvPr>
-            <p:ph type="sldImg"/>
-          </p:nvPr>
-        </p:nvSpPr>
-        <p:spPr/>
-      </p:sp>
-      <p:sp>
-        <p:nvSpPr>
-          <p:cNvPr id="3" name="슬라이드 노트 개체 틀 2"/>
-          <p:cNvSpPr>
-            <a:spLocks noGrp="1"/>
-          </p:cNvSpPr>
-          <p:nvPr>
-            <p:ph type="body" idx="1"/>
-          </p:nvPr>
-        </p:nvSpPr>
-        <p:spPr/>
-        <p:txBody>
-          <a:bodyPr/>
-          <a:lstStyle/>
-          <a:p>
-            <a:r>
-              <a:rPr lang="en-US" altLang="ko-KR" dirty="0"/>
-              <a:t>https://huidea.tistory.com/233</a:t>
-            </a:r>
-            <a:endParaRPr lang="ko-KR" altLang="en-US" dirty="0"/>
-          </a:p>
-        </p:txBody>
-      </p:sp>
-      <p:sp>
-        <p:nvSpPr>
-          <p:cNvPr id="4" name="슬라이드 번호 개체 틀 3"/>
-          <p:cNvSpPr>
-            <a:spLocks noGrp="1"/>
-          </p:cNvSpPr>
-          <p:nvPr>
-            <p:ph type="sldNum" sz="quarter" idx="5"/>
-          </p:nvPr>
-        </p:nvSpPr>
-        <p:spPr/>
-        <p:txBody>
-          <a:bodyPr/>
-          <a:lstStyle/>
-          <a:p>
-            <a:fld id="{353DFDED-2E9F-41DA-A9FA-780DFF41939C}" type="slidenum">
-              <a:rPr lang="ko-KR" altLang="en-US" smtClean="0"/>
-              <a:t>32</a:t>
-            </a:fld>
-            <a:endParaRPr lang="ko-KR" altLang="en-US"/>
-          </a:p>
-        </p:txBody>
-      </p:sp>
-    </p:spTree>
-    <p:extLst>
-      <p:ext uri="{BB962C8B-B14F-4D97-AF65-F5344CB8AC3E}">
-        <p14:creationId xmlns:p14="http://schemas.microsoft.com/office/powerpoint/2010/main" val="158231153"/>
-      </p:ext>
-    </p:extLst>
-  </p:cSld>
-  <p:clrMapOvr>
-    <a:masterClrMapping/>
-  </p:clrMapOvr>
-</p:notes>
-</file>
-
-<file path=ppt/notesSlides/notesSlide26.xml><?xml version="1.0" encoding="utf-8"?>
-<p:notes xmlns:a="http://schemas.openxmlformats.org/drawingml/2006/main" xmlns:r="http://schemas.openxmlformats.org/officeDocument/2006/relationships" xmlns:p="http://schemas.openxmlformats.org/presentationml/2006/main">
-  <p:cSld>
-    <p:spTree>
-      <p:nvGrpSpPr>
-        <p:cNvPr id="1" name=""/>
-        <p:cNvGrpSpPr/>
-        <p:nvPr/>
-      </p:nvGrpSpPr>
-      <p:grpSpPr>
-        <a:xfrm>
-          <a:off x="0" y="0"/>
-          <a:ext cx="0" cy="0"/>
-          <a:chOff x="0" y="0"/>
-          <a:chExt cx="0" cy="0"/>
-        </a:xfrm>
-      </p:grpSpPr>
-      <p:sp>
-        <p:nvSpPr>
-          <p:cNvPr id="2" name="슬라이드 이미지 개체 틀 1"/>
-          <p:cNvSpPr>
-            <a:spLocks noGrp="1" noRot="1" noChangeAspect="1"/>
-          </p:cNvSpPr>
-          <p:nvPr>
-            <p:ph type="sldImg"/>
-          </p:nvPr>
-        </p:nvSpPr>
-        <p:spPr/>
-      </p:sp>
-      <p:sp>
-        <p:nvSpPr>
-          <p:cNvPr id="3" name="슬라이드 노트 개체 틀 2"/>
-          <p:cNvSpPr>
-            <a:spLocks noGrp="1"/>
-          </p:cNvSpPr>
-          <p:nvPr>
-            <p:ph type="body" idx="1"/>
-          </p:nvPr>
-        </p:nvSpPr>
-        <p:spPr/>
-        <p:txBody>
-          <a:bodyPr/>
-          <a:lstStyle/>
-          <a:p>
-            <a:r>
-              <a:rPr lang="en-US" altLang="ko-KR" dirty="0"/>
-              <a:t>https://huidea.tistory.com/233</a:t>
-            </a:r>
-            <a:endParaRPr lang="ko-KR" altLang="en-US" dirty="0"/>
-          </a:p>
-        </p:txBody>
-      </p:sp>
-      <p:sp>
-        <p:nvSpPr>
-          <p:cNvPr id="4" name="슬라이드 번호 개체 틀 3"/>
-          <p:cNvSpPr>
-            <a:spLocks noGrp="1"/>
-          </p:cNvSpPr>
-          <p:nvPr>
-            <p:ph type="sldNum" sz="quarter" idx="5"/>
-          </p:nvPr>
-        </p:nvSpPr>
-        <p:spPr/>
-        <p:txBody>
-          <a:bodyPr/>
-          <a:lstStyle/>
-          <a:p>
-            <a:fld id="{353DFDED-2E9F-41DA-A9FA-780DFF41939C}" type="slidenum">
-              <a:rPr lang="ko-KR" altLang="en-US" smtClean="0"/>
-              <a:t>33</a:t>
-            </a:fld>
-            <a:endParaRPr lang="ko-KR" altLang="en-US"/>
-          </a:p>
-        </p:txBody>
-      </p:sp>
-    </p:spTree>
-    <p:extLst>
-      <p:ext uri="{BB962C8B-B14F-4D97-AF65-F5344CB8AC3E}">
-        <p14:creationId xmlns:p14="http://schemas.microsoft.com/office/powerpoint/2010/main" val="1410373742"/>
-      </p:ext>
-    </p:extLst>
-  </p:cSld>
-  <p:clrMapOvr>
-    <a:masterClrMapping/>
-  </p:clrMapOvr>
-</p:notes>
-</file>
-
-<file path=ppt/notesSlides/notesSlide27.xml><?xml version="1.0" encoding="utf-8"?>
-<p:notes xmlns:a="http://schemas.openxmlformats.org/drawingml/2006/main" xmlns:r="http://schemas.openxmlformats.org/officeDocument/2006/relationships" xmlns:p="http://schemas.openxmlformats.org/presentationml/2006/main">
-  <p:cSld>
-    <p:spTree>
-      <p:nvGrpSpPr>
-        <p:cNvPr id="1" name=""/>
-        <p:cNvGrpSpPr/>
-        <p:nvPr/>
-      </p:nvGrpSpPr>
-      <p:grpSpPr>
-        <a:xfrm>
-          <a:off x="0" y="0"/>
-          <a:ext cx="0" cy="0"/>
-          <a:chOff x="0" y="0"/>
-          <a:chExt cx="0" cy="0"/>
-        </a:xfrm>
-      </p:grpSpPr>
-      <p:sp>
-        <p:nvSpPr>
-          <p:cNvPr id="2" name="슬라이드 이미지 개체 틀 1"/>
-          <p:cNvSpPr>
-            <a:spLocks noGrp="1" noRot="1" noChangeAspect="1"/>
-          </p:cNvSpPr>
-          <p:nvPr>
-            <p:ph type="sldImg"/>
-          </p:nvPr>
-        </p:nvSpPr>
-        <p:spPr/>
-      </p:sp>
-      <p:sp>
-        <p:nvSpPr>
-          <p:cNvPr id="3" name="슬라이드 노트 개체 틀 2"/>
-          <p:cNvSpPr>
-            <a:spLocks noGrp="1"/>
-          </p:cNvSpPr>
-          <p:nvPr>
-            <p:ph type="body" idx="1"/>
-          </p:nvPr>
-        </p:nvSpPr>
-        <p:spPr/>
-        <p:txBody>
-          <a:bodyPr/>
-          <a:lstStyle/>
-          <a:p>
-            <a:r>
-              <a:rPr lang="en-US" altLang="ko-KR" dirty="0"/>
-              <a:t>https://huidea.tistory.com/233</a:t>
-            </a:r>
-            <a:endParaRPr lang="ko-KR" altLang="en-US" dirty="0"/>
-          </a:p>
-        </p:txBody>
-      </p:sp>
-      <p:sp>
-        <p:nvSpPr>
-          <p:cNvPr id="4" name="슬라이드 번호 개체 틀 3"/>
-          <p:cNvSpPr>
-            <a:spLocks noGrp="1"/>
-          </p:cNvSpPr>
-          <p:nvPr>
-            <p:ph type="sldNum" sz="quarter" idx="5"/>
-          </p:nvPr>
-        </p:nvSpPr>
-        <p:spPr/>
-        <p:txBody>
-          <a:bodyPr/>
-          <a:lstStyle/>
-          <a:p>
-            <a:fld id="{353DFDED-2E9F-41DA-A9FA-780DFF41939C}" type="slidenum">
-              <a:rPr lang="ko-KR" altLang="en-US" smtClean="0"/>
-              <a:t>34</a:t>
-            </a:fld>
-            <a:endParaRPr lang="ko-KR" altLang="en-US"/>
-          </a:p>
-        </p:txBody>
-      </p:sp>
-    </p:spTree>
-    <p:extLst>
-      <p:ext uri="{BB962C8B-B14F-4D97-AF65-F5344CB8AC3E}">
-        <p14:creationId xmlns:p14="http://schemas.microsoft.com/office/powerpoint/2010/main" val="204747547"/>
-      </p:ext>
-    </p:extLst>
-  </p:cSld>
-  <p:clrMapOvr>
-    <a:masterClrMapping/>
-  </p:clrMapOvr>
-</p:notes>
-</file>
-
-<file path=ppt/notesSlides/notesSlide3.xml><?xml version="1.0" encoding="utf-8"?>
-<p:notes xmlns:a="http://schemas.openxmlformats.org/drawingml/2006/main" xmlns:r="http://schemas.openxmlformats.org/officeDocument/2006/relationships" xmlns:p="http://schemas.openxmlformats.org/presentationml/2006/main">
-  <p:cSld>
-    <p:spTree>
-      <p:nvGrpSpPr>
-        <p:cNvPr id="1" name=""/>
-        <p:cNvGrpSpPr/>
-        <p:nvPr/>
-      </p:nvGrpSpPr>
-      <p:grpSpPr>
-        <a:xfrm>
-          <a:off x="0" y="0"/>
-          <a:ext cx="0" cy="0"/>
-          <a:chOff x="0" y="0"/>
-          <a:chExt cx="0" cy="0"/>
-        </a:xfrm>
-      </p:grpSpPr>
-      <p:sp>
-        <p:nvSpPr>
-          <p:cNvPr id="2" name="슬라이드 이미지 개체 틀 1"/>
-          <p:cNvSpPr>
-            <a:spLocks noGrp="1" noRot="1" noChangeAspect="1"/>
-          </p:cNvSpPr>
-          <p:nvPr>
-            <p:ph type="sldImg"/>
-          </p:nvPr>
-        </p:nvSpPr>
-        <p:spPr/>
-      </p:sp>
-      <p:sp>
-        <p:nvSpPr>
-          <p:cNvPr id="3" name="슬라이드 노트 개체 틀 2"/>
-          <p:cNvSpPr>
-            <a:spLocks noGrp="1"/>
-          </p:cNvSpPr>
-          <p:nvPr>
-            <p:ph type="body" idx="1"/>
-          </p:nvPr>
-        </p:nvSpPr>
-        <p:spPr/>
-        <p:txBody>
-          <a:bodyPr/>
-          <a:lstStyle/>
-          <a:p>
-            <a:r>
-              <a:rPr lang="en-US" altLang="ko-KR" dirty="0"/>
-              <a:t>https://specialscene.tistory.com/151</a:t>
-            </a:r>
-          </a:p>
-          <a:p>
-            <a:r>
-              <a:rPr lang="en-US" altLang="ko-KR"/>
-              <a:t>https://blog.naver.com/awess0me/222513273296</a:t>
-            </a:r>
-            <a:endParaRPr lang="ko-KR" altLang="en-US" dirty="0"/>
-          </a:p>
-        </p:txBody>
-      </p:sp>
-      <p:sp>
-        <p:nvSpPr>
-          <p:cNvPr id="4" name="슬라이드 번호 개체 틀 3"/>
-          <p:cNvSpPr>
-            <a:spLocks noGrp="1"/>
-          </p:cNvSpPr>
-          <p:nvPr>
-            <p:ph type="sldNum" sz="quarter" idx="5"/>
-          </p:nvPr>
-        </p:nvSpPr>
-        <p:spPr/>
-        <p:txBody>
-          <a:bodyPr/>
-          <a:lstStyle/>
-          <a:p>
-            <a:fld id="{353DFDED-2E9F-41DA-A9FA-780DFF41939C}" type="slidenum">
-              <a:rPr lang="ko-KR" altLang="en-US" smtClean="0"/>
               <a:t>6</a:t>
             </a:fld>
             <a:endParaRPr lang="ko-KR" altLang="en-US"/>
@@ -2434,7 +3042,7 @@
 </p:notes>
 </file>
 
-<file path=ppt/notesSlides/notesSlide4.xml><?xml version="1.0" encoding="utf-8"?>
+<file path=ppt/notesSlides/notesSlide7.xml><?xml version="1.0" encoding="utf-8"?>
 <p:notes xmlns:a="http://schemas.openxmlformats.org/drawingml/2006/main" xmlns:r="http://schemas.openxmlformats.org/officeDocument/2006/relationships" xmlns:p="http://schemas.openxmlformats.org/presentationml/2006/main">
   <p:cSld>
     <p:spTree>
@@ -2542,7 +3150,7 @@
 </p:notes>
 </file>
 
-<file path=ppt/notesSlides/notesSlide5.xml><?xml version="1.0" encoding="utf-8"?>
+<file path=ppt/notesSlides/notesSlide8.xml><?xml version="1.0" encoding="utf-8"?>
 <p:notes xmlns:a="http://schemas.openxmlformats.org/drawingml/2006/main" xmlns:r="http://schemas.openxmlformats.org/officeDocument/2006/relationships" xmlns:p="http://schemas.openxmlformats.org/presentationml/2006/main">
   <p:cSld>
     <p:spTree>
@@ -2650,290 +3258,6 @@
 </p:notes>
 </file>
 
-<file path=ppt/notesSlides/notesSlide6.xml><?xml version="1.0" encoding="utf-8"?>
-<p:notes xmlns:a="http://schemas.openxmlformats.org/drawingml/2006/main" xmlns:r="http://schemas.openxmlformats.org/officeDocument/2006/relationships" xmlns:p="http://schemas.openxmlformats.org/presentationml/2006/main">
-  <p:cSld>
-    <p:spTree>
-      <p:nvGrpSpPr>
-        <p:cNvPr id="1" name=""/>
-        <p:cNvGrpSpPr/>
-        <p:nvPr/>
-      </p:nvGrpSpPr>
-      <p:grpSpPr>
-        <a:xfrm>
-          <a:off x="0" y="0"/>
-          <a:ext cx="0" cy="0"/>
-          <a:chOff x="0" y="0"/>
-          <a:chExt cx="0" cy="0"/>
-        </a:xfrm>
-      </p:grpSpPr>
-      <p:sp>
-        <p:nvSpPr>
-          <p:cNvPr id="2" name="슬라이드 이미지 개체 틀 1"/>
-          <p:cNvSpPr>
-            <a:spLocks noGrp="1" noRot="1" noChangeAspect="1"/>
-          </p:cNvSpPr>
-          <p:nvPr>
-            <p:ph type="sldImg"/>
-          </p:nvPr>
-        </p:nvSpPr>
-        <p:spPr/>
-      </p:sp>
-      <p:sp>
-        <p:nvSpPr>
-          <p:cNvPr id="3" name="슬라이드 노트 개체 틀 2"/>
-          <p:cNvSpPr>
-            <a:spLocks noGrp="1"/>
-          </p:cNvSpPr>
-          <p:nvPr>
-            <p:ph type="body" idx="1"/>
-          </p:nvPr>
-        </p:nvSpPr>
-        <p:spPr/>
-        <p:txBody>
-          <a:bodyPr/>
-          <a:lstStyle/>
-          <a:p>
-            <a:r>
-              <a:rPr lang="en-US" altLang="ko-KR" dirty="0"/>
-              <a:t>http://bigdata.dongguk.ac.kr/lectures/bigdata/_book/%EB%B9%85%EB%8D%B0%EC%9D%B4%ED%84%B0%EA%B0%9C%EC%9A%94.html#%EB%B9%85%EB%8D%B0%EC%9D%B4%ED%84%B0%EC%9D%98-%EB%B0%B0%EA%B2%BD</a:t>
-            </a:r>
-            <a:endParaRPr lang="ko-KR" altLang="en-US" dirty="0"/>
-          </a:p>
-        </p:txBody>
-      </p:sp>
-      <p:sp>
-        <p:nvSpPr>
-          <p:cNvPr id="4" name="슬라이드 번호 개체 틀 3"/>
-          <p:cNvSpPr>
-            <a:spLocks noGrp="1"/>
-          </p:cNvSpPr>
-          <p:nvPr>
-            <p:ph type="sldNum" sz="quarter" idx="5"/>
-          </p:nvPr>
-        </p:nvSpPr>
-        <p:spPr/>
-        <p:txBody>
-          <a:bodyPr/>
-          <a:lstStyle/>
-          <a:p>
-            <a:fld id="{353DFDED-2E9F-41DA-A9FA-780DFF41939C}" type="slidenum">
-              <a:rPr lang="ko-KR" altLang="en-US" smtClean="0"/>
-              <a:t>10</a:t>
-            </a:fld>
-            <a:endParaRPr lang="ko-KR" altLang="en-US"/>
-          </a:p>
-        </p:txBody>
-      </p:sp>
-    </p:spTree>
-    <p:extLst>
-      <p:ext uri="{BB962C8B-B14F-4D97-AF65-F5344CB8AC3E}">
-        <p14:creationId xmlns:p14="http://schemas.microsoft.com/office/powerpoint/2010/main" val="2470243557"/>
-      </p:ext>
-    </p:extLst>
-  </p:cSld>
-  <p:clrMapOvr>
-    <a:masterClrMapping/>
-  </p:clrMapOvr>
-</p:notes>
-</file>
-
-<file path=ppt/notesSlides/notesSlide7.xml><?xml version="1.0" encoding="utf-8"?>
-<p:notes xmlns:a="http://schemas.openxmlformats.org/drawingml/2006/main" xmlns:r="http://schemas.openxmlformats.org/officeDocument/2006/relationships" xmlns:p="http://schemas.openxmlformats.org/presentationml/2006/main">
-  <p:cSld>
-    <p:spTree>
-      <p:nvGrpSpPr>
-        <p:cNvPr id="1" name=""/>
-        <p:cNvGrpSpPr/>
-        <p:nvPr/>
-      </p:nvGrpSpPr>
-      <p:grpSpPr>
-        <a:xfrm>
-          <a:off x="0" y="0"/>
-          <a:ext cx="0" cy="0"/>
-          <a:chOff x="0" y="0"/>
-          <a:chExt cx="0" cy="0"/>
-        </a:xfrm>
-      </p:grpSpPr>
-      <p:sp>
-        <p:nvSpPr>
-          <p:cNvPr id="2" name="슬라이드 이미지 개체 틀 1"/>
-          <p:cNvSpPr>
-            <a:spLocks noGrp="1" noRot="1" noChangeAspect="1"/>
-          </p:cNvSpPr>
-          <p:nvPr>
-            <p:ph type="sldImg"/>
-          </p:nvPr>
-        </p:nvSpPr>
-        <p:spPr/>
-      </p:sp>
-      <p:sp>
-        <p:nvSpPr>
-          <p:cNvPr id="3" name="슬라이드 노트 개체 틀 2"/>
-          <p:cNvSpPr>
-            <a:spLocks noGrp="1"/>
-          </p:cNvSpPr>
-          <p:nvPr>
-            <p:ph type="body" idx="1"/>
-          </p:nvPr>
-        </p:nvSpPr>
-        <p:spPr/>
-        <p:txBody>
-          <a:bodyPr/>
-          <a:lstStyle/>
-          <a:p>
-            <a:endParaRPr lang="ko-KR" altLang="en-US" dirty="0"/>
-          </a:p>
-        </p:txBody>
-      </p:sp>
-      <p:sp>
-        <p:nvSpPr>
-          <p:cNvPr id="4" name="슬라이드 번호 개체 틀 3"/>
-          <p:cNvSpPr>
-            <a:spLocks noGrp="1"/>
-          </p:cNvSpPr>
-          <p:nvPr>
-            <p:ph type="sldNum" sz="quarter" idx="5"/>
-          </p:nvPr>
-        </p:nvSpPr>
-        <p:spPr/>
-        <p:txBody>
-          <a:bodyPr/>
-          <a:lstStyle/>
-          <a:p>
-            <a:fld id="{353DFDED-2E9F-41DA-A9FA-780DFF41939C}" type="slidenum">
-              <a:rPr lang="ko-KR" altLang="en-US" smtClean="0"/>
-              <a:t>11</a:t>
-            </a:fld>
-            <a:endParaRPr lang="ko-KR" altLang="en-US"/>
-          </a:p>
-        </p:txBody>
-      </p:sp>
-    </p:spTree>
-    <p:extLst>
-      <p:ext uri="{BB962C8B-B14F-4D97-AF65-F5344CB8AC3E}">
-        <p14:creationId xmlns:p14="http://schemas.microsoft.com/office/powerpoint/2010/main" val="1788561133"/>
-      </p:ext>
-    </p:extLst>
-  </p:cSld>
-  <p:clrMapOvr>
-    <a:masterClrMapping/>
-  </p:clrMapOvr>
-</p:notes>
-</file>
-
-<file path=ppt/notesSlides/notesSlide8.xml><?xml version="1.0" encoding="utf-8"?>
-<p:notes xmlns:a="http://schemas.openxmlformats.org/drawingml/2006/main" xmlns:r="http://schemas.openxmlformats.org/officeDocument/2006/relationships" xmlns:p="http://schemas.openxmlformats.org/presentationml/2006/main">
-  <p:cSld>
-    <p:spTree>
-      <p:nvGrpSpPr>
-        <p:cNvPr id="1" name="">
-          <a:extLst>
-            <a:ext uri="{FF2B5EF4-FFF2-40B4-BE49-F238E27FC236}">
-              <a16:creationId xmlns:a16="http://schemas.microsoft.com/office/drawing/2014/main" id="{6438BA2C-2480-B761-7F4D-177F139769A8}"/>
-            </a:ext>
-          </a:extLst>
-        </p:cNvPr>
-        <p:cNvGrpSpPr/>
-        <p:nvPr/>
-      </p:nvGrpSpPr>
-      <p:grpSpPr>
-        <a:xfrm>
-          <a:off x="0" y="0"/>
-          <a:ext cx="0" cy="0"/>
-          <a:chOff x="0" y="0"/>
-          <a:chExt cx="0" cy="0"/>
-        </a:xfrm>
-      </p:grpSpPr>
-      <p:sp>
-        <p:nvSpPr>
-          <p:cNvPr id="2" name="슬라이드 이미지 개체 틀 1">
-            <a:extLst>
-              <a:ext uri="{FF2B5EF4-FFF2-40B4-BE49-F238E27FC236}">
-                <a16:creationId xmlns:a16="http://schemas.microsoft.com/office/drawing/2014/main" id="{E5FDB332-4CCA-C229-839E-9654695517E1}"/>
-              </a:ext>
-            </a:extLst>
-          </p:cNvPr>
-          <p:cNvSpPr>
-            <a:spLocks noGrp="1" noRot="1" noChangeAspect="1"/>
-          </p:cNvSpPr>
-          <p:nvPr>
-            <p:ph type="sldImg"/>
-          </p:nvPr>
-        </p:nvSpPr>
-        <p:spPr/>
-      </p:sp>
-      <p:sp>
-        <p:nvSpPr>
-          <p:cNvPr id="3" name="슬라이드 노트 개체 틀 2">
-            <a:extLst>
-              <a:ext uri="{FF2B5EF4-FFF2-40B4-BE49-F238E27FC236}">
-                <a16:creationId xmlns:a16="http://schemas.microsoft.com/office/drawing/2014/main" id="{DB661E98-7067-30D5-C55A-383FEDAB0E29}"/>
-              </a:ext>
-            </a:extLst>
-          </p:cNvPr>
-          <p:cNvSpPr>
-            <a:spLocks noGrp="1"/>
-          </p:cNvSpPr>
-          <p:nvPr>
-            <p:ph type="body" idx="1"/>
-          </p:nvPr>
-        </p:nvSpPr>
-        <p:spPr/>
-        <p:txBody>
-          <a:bodyPr/>
-          <a:lstStyle/>
-          <a:p>
-            <a:r>
-              <a:rPr lang="en-US" altLang="ko-KR" dirty="0"/>
-              <a:t>https://velog.io/@kungsboy/%EB%8D%B0%EC%9D%B4%ED%84%B0%EB%B6%84%EC%84%9D-%ED%86%B5%EA%B3%84%EC%9D%98-%EB%B3%B8%EC%A7%88%EB%B6%84%EC%82%B0%EC%9D%B4-%EB%A7%88%EB%B2%95%EC%9D%B8-%EC%9D%B4%EC%9C%A0</a:t>
-            </a:r>
-            <a:endParaRPr lang="ko-KR" altLang="en-US" dirty="0"/>
-          </a:p>
-        </p:txBody>
-      </p:sp>
-      <p:sp>
-        <p:nvSpPr>
-          <p:cNvPr id="4" name="슬라이드 번호 개체 틀 3">
-            <a:extLst>
-              <a:ext uri="{FF2B5EF4-FFF2-40B4-BE49-F238E27FC236}">
-                <a16:creationId xmlns:a16="http://schemas.microsoft.com/office/drawing/2014/main" id="{AC8AA931-BC8C-9AA5-D394-EB4B165E6EE1}"/>
-              </a:ext>
-            </a:extLst>
-          </p:cNvPr>
-          <p:cNvSpPr>
-            <a:spLocks noGrp="1"/>
-          </p:cNvSpPr>
-          <p:nvPr>
-            <p:ph type="sldNum" sz="quarter" idx="5"/>
-          </p:nvPr>
-        </p:nvSpPr>
-        <p:spPr/>
-        <p:txBody>
-          <a:bodyPr/>
-          <a:lstStyle/>
-          <a:p>
-            <a:fld id="{353DFDED-2E9F-41DA-A9FA-780DFF41939C}" type="slidenum">
-              <a:rPr lang="ko-KR" altLang="en-US" smtClean="0"/>
-              <a:t>12</a:t>
-            </a:fld>
-            <a:endParaRPr lang="ko-KR" altLang="en-US"/>
-          </a:p>
-        </p:txBody>
-      </p:sp>
-    </p:spTree>
-    <p:extLst>
-      <p:ext uri="{BB962C8B-B14F-4D97-AF65-F5344CB8AC3E}">
-        <p14:creationId xmlns:p14="http://schemas.microsoft.com/office/powerpoint/2010/main" val="1410300145"/>
-      </p:ext>
-    </p:extLst>
-  </p:cSld>
-  <p:clrMapOvr>
-    <a:masterClrMapping/>
-  </p:clrMapOvr>
-</p:notes>
-</file>
-
 <file path=ppt/notesSlides/notesSlide9.xml><?xml version="1.0" encoding="utf-8"?>
 <p:notes xmlns:a="http://schemas.openxmlformats.org/drawingml/2006/main" xmlns:r="http://schemas.openxmlformats.org/officeDocument/2006/relationships" xmlns:p="http://schemas.openxmlformats.org/presentationml/2006/main">
   <p:cSld>
@@ -2980,7 +3304,7 @@
           <a:p>
             <a:r>
               <a:rPr lang="en-US" altLang="ko-KR" dirty="0"/>
-              <a:t>https://learnx.tistory.com/entry/%ED%86%B5%EA%B3%84%EC%9D%98-%EA%B8%B0%EC%B4%88%EC%9D%B8-%ED%8F%89%EA%B7%A0-%EB%B6%84%EC%82%B0-%ED%91%9C%EC%A4%80%ED%8E%B8%EC%B0%A8</a:t>
+              <a:t>http://bigdata.dongguk.ac.kr/lectures/bigdata/_book/%EB%B9%85%EB%8D%B0%EC%9D%B4%ED%84%B0%EA%B0%9C%EC%9A%94.html#%EB%B9%85%EB%8D%B0%EC%9D%B4%ED%84%B0%EC%9D%98-%EB%B0%B0%EA%B2%BD</a:t>
             </a:r>
             <a:endParaRPr lang="ko-KR" altLang="en-US" dirty="0"/>
           </a:p>
@@ -3003,7 +3327,7 @@
           <a:p>
             <a:fld id="{353DFDED-2E9F-41DA-A9FA-780DFF41939C}" type="slidenum">
               <a:rPr lang="ko-KR" altLang="en-US" smtClean="0"/>
-              <a:t>13</a:t>
+              <a:t>10</a:t>
             </a:fld>
             <a:endParaRPr lang="ko-KR" altLang="en-US"/>
           </a:p>
@@ -3012,7 +3336,7 @@
     </p:spTree>
     <p:extLst>
       <p:ext uri="{BB962C8B-B14F-4D97-AF65-F5344CB8AC3E}">
-        <p14:creationId xmlns:p14="http://schemas.microsoft.com/office/powerpoint/2010/main" val="1305977835"/>
+        <p14:creationId xmlns:p14="http://schemas.microsoft.com/office/powerpoint/2010/main" val="2470243557"/>
       </p:ext>
     </p:extLst>
   </p:cSld>
@@ -3673,7 +3997,7 @@
           <p:nvPr/>
         </p:nvPicPr>
         <p:blipFill>
-          <a:blip r:embed="rId2">
+          <a:blip r:embed="rId3">
             <a:extLst>
               <a:ext uri="{28A0092B-C50C-407E-A947-70E740481C1C}">
                 <a14:useLocalDpi xmlns:a14="http://schemas.microsoft.com/office/drawing/2010/main" val="0"/>
@@ -10089,7 +10413,7 @@
             <p:nvPr/>
           </p:nvPicPr>
           <p:blipFill>
-            <a:blip r:embed="rId2" cstate="print">
+            <a:blip r:embed="rId3" cstate="print">
               <a:extLst>
                 <a:ext uri="{28A0092B-C50C-407E-A947-70E740481C1C}">
                   <a14:useLocalDpi xmlns:a14="http://schemas.microsoft.com/office/drawing/2010/main" val="0"/>
@@ -10190,7 +10514,7 @@
             <p:nvPr/>
           </p:nvPicPr>
           <p:blipFill>
-            <a:blip r:embed="rId3" cstate="print">
+            <a:blip r:embed="rId4" cstate="print">
               <a:extLst>
                 <a:ext uri="{28A0092B-C50C-407E-A947-70E740481C1C}">
                   <a14:useLocalDpi xmlns:a14="http://schemas.microsoft.com/office/drawing/2010/main" val="0"/>
@@ -10291,7 +10615,7 @@
             <p:nvPr/>
           </p:nvPicPr>
           <p:blipFill>
-            <a:blip r:embed="rId4" cstate="print">
+            <a:blip r:embed="rId5" cstate="print">
               <a:extLst>
                 <a:ext uri="{28A0092B-C50C-407E-A947-70E740481C1C}">
                   <a14:useLocalDpi xmlns:a14="http://schemas.microsoft.com/office/drawing/2010/main" val="0"/>
@@ -10392,7 +10716,7 @@
             <p:nvPr/>
           </p:nvPicPr>
           <p:blipFill>
-            <a:blip r:embed="rId5" cstate="print">
+            <a:blip r:embed="rId6" cstate="print">
               <a:extLst>
                 <a:ext uri="{28A0092B-C50C-407E-A947-70E740481C1C}">
                   <a14:useLocalDpi xmlns:a14="http://schemas.microsoft.com/office/drawing/2010/main" val="0"/>
@@ -10507,7 +10831,7 @@
               <p:nvPr/>
             </p:nvPicPr>
             <p:blipFill>
-              <a:blip r:embed="rId6" cstate="print">
+              <a:blip r:embed="rId7" cstate="print">
                 <a:extLst>
                   <a:ext uri="{28A0092B-C50C-407E-A947-70E740481C1C}">
                     <a14:useLocalDpi xmlns:a14="http://schemas.microsoft.com/office/drawing/2010/main" val="0"/>
@@ -10537,7 +10861,7 @@
               <p:nvPr/>
             </p:nvPicPr>
             <p:blipFill>
-              <a:blip r:embed="rId7" cstate="print">
+              <a:blip r:embed="rId8" cstate="print">
                 <a:extLst>
                   <a:ext uri="{28A0092B-C50C-407E-A947-70E740481C1C}">
                     <a14:useLocalDpi xmlns:a14="http://schemas.microsoft.com/office/drawing/2010/main" val="0"/>
@@ -10567,7 +10891,7 @@
               <p:nvPr/>
             </p:nvPicPr>
             <p:blipFill>
-              <a:blip r:embed="rId8" cstate="print">
+              <a:blip r:embed="rId9" cstate="print">
                 <a:extLst>
                   <a:ext uri="{28A0092B-C50C-407E-A947-70E740481C1C}">
                     <a14:useLocalDpi xmlns:a14="http://schemas.microsoft.com/office/drawing/2010/main" val="0"/>
@@ -10599,7 +10923,7 @@
           <p:nvPr/>
         </p:nvPicPr>
         <p:blipFill rotWithShape="1">
-          <a:blip r:embed="rId9" cstate="print">
+          <a:blip r:embed="rId10" cstate="print">
             <a:extLst>
               <a:ext uri="{28A0092B-C50C-407E-A947-70E740481C1C}">
                 <a14:useLocalDpi xmlns:a14="http://schemas.microsoft.com/office/drawing/2010/main" val="0"/>
@@ -21093,8 +21417,8 @@
           </a:p>
         </p:txBody>
       </p:sp>
-      <mc:AlternateContent xmlns:mc="http://schemas.openxmlformats.org/markup-compatibility/2006">
-        <mc:Choice xmlns:a14="http://schemas.microsoft.com/office/drawing/2010/main" Requires="a14">
+      <mc:AlternateContent xmlns:mc="http://schemas.openxmlformats.org/markup-compatibility/2006" xmlns:a14="http://schemas.microsoft.com/office/drawing/2010/main">
+        <mc:Choice Requires="a14">
           <p:sp>
             <p:nvSpPr>
               <p:cNvPr id="9" name="모서리가 둥근 직사각형 7">
@@ -21299,7 +21623,7 @@
             </p:txBody>
           </p:sp>
         </mc:Choice>
-        <mc:Fallback>
+        <mc:Fallback xmlns="">
           <p:sp>
             <p:nvSpPr>
               <p:cNvPr id="9" name="모서리가 둥근 직사각형 7">
@@ -21821,8 +22145,8 @@
           </a:p>
         </p:txBody>
       </p:sp>
-      <mc:AlternateContent xmlns:mc="http://schemas.openxmlformats.org/markup-compatibility/2006">
-        <mc:Choice xmlns:a14="http://schemas.microsoft.com/office/drawing/2010/main" Requires="a14">
+      <mc:AlternateContent xmlns:mc="http://schemas.openxmlformats.org/markup-compatibility/2006" xmlns:a14="http://schemas.microsoft.com/office/drawing/2010/main">
+        <mc:Choice Requires="a14">
           <p:sp>
             <p:nvSpPr>
               <p:cNvPr id="9" name="모서리가 둥근 직사각형 7">
@@ -22048,7 +22372,7 @@
             </p:txBody>
           </p:sp>
         </mc:Choice>
-        <mc:Fallback>
+        <mc:Fallback xmlns="">
           <p:sp>
             <p:nvSpPr>
               <p:cNvPr id="9" name="모서리가 둥근 직사각형 7">
